--- a/1 - Introduzione a Docker.pptx
+++ b/1 - Introduzione a Docker.pptx
@@ -270,7 +270,7 @@
           <a:p>
             <a:fld id="{AB567D21-D55F-4A7B-94FF-7608FD989819}" type="datetimeFigureOut">
               <a:rPr lang="it-IT" smtClean="0"/>
-              <a:t>07/06/2026</a:t>
+              <a:t>15/06/2026</a:t>
             </a:fld>
             <a:endParaRPr lang="it-IT"/>
           </a:p>
@@ -463,7 +463,7 @@
           <a:p>
             <a:fld id="{CE0B2B73-14A8-482F-9803-A95CC73B5B34}" type="datetimeFigureOut">
               <a:rPr lang="it-IT" smtClean="0"/>
-              <a:t>07/06/2026</a:t>
+              <a:t>15/06/2026</a:t>
             </a:fld>
             <a:endParaRPr lang="it-IT"/>
           </a:p>
@@ -8290,31 +8290,83 @@
           <a:p>
             <a:r>
               <a:rPr lang="it-IT" dirty="0"/>
-              <a:t>Docker è una piattaforma software Open Source progettata per automatizzare la creazione, la distribuzione e l'esecuzione di applicazioni dentro ambienti isolati, leggeri e autosufficienti chiamati container. </a:t>
-            </a:r>
-          </a:p>
-          <a:p>
-            <a:r>
-              <a:rPr lang="it-IT" dirty="0"/>
-              <a:t>Tradizionalmente, il deployment soffriva della discrepanza tra gli ambienti di sviluppo e quelli di produzione (versioni di librerie differenti, patch del sistema operativo mancanti), generando il classico problema del "funziona solo sulla mia macchina". </a:t>
-            </a:r>
-          </a:p>
-          <a:p>
-            <a:r>
-              <a:rPr lang="it-IT" dirty="0"/>
-              <a:t>Docker risolve radicalmente questa frizione non virtualizzando l'hardware, ma isolando i processi a livello software. Quindi non emula l’hardware (come accade per le Virtual Machine), né include un sistema operativo completo.</a:t>
-            </a:r>
-          </a:p>
-          <a:p>
-            <a:r>
-              <a:rPr lang="it-IT" dirty="0"/>
-              <a:t>I container racchiudono l'applicazione e l'esatto ecosistema di dipendenze di cui ha bisogno per girare. Questo garantisce che il software si comporti in modo identico su qualsiasi macchina ospitante (Host), che si tratti del computer portatile di uno sviluppatore, di un server aziendale locale on-premise o di un'istanza cloud, azzerando i tempi di configurazione.</a:t>
-            </a:r>
-          </a:p>
-          <a:p>
-            <a:r>
-              <a:rPr lang="it-IT" dirty="0"/>
-              <a:t>Docker non è nato per sostituire la programmazione, ma per colmare il divario distruttivo tra il mondo dello sviluppo (Dev) e quello delle operazioni sistemistiche (Ops), inaugurando di fatto l'era della metodologia </a:t>
+              <a:t>Docker è una piattaforma software Open Source </a:t>
+            </a:r>
+            <a:r>
+              <a:rPr lang="it-IT" dirty="0">
+                <a:solidFill>
+                  <a:srgbClr val="171FE2"/>
+                </a:solidFill>
+              </a:rPr>
+              <a:t>progettata per automatizzare la creazione, la distribuzione e l'esecuzione di applicazioni dentro ambienti isolati</a:t>
+            </a:r>
+            <a:r>
+              <a:rPr lang="it-IT" dirty="0"/>
+              <a:t>, leggeri e autosufficienti chiamati container. </a:t>
+            </a:r>
+          </a:p>
+          <a:p>
+            <a:endParaRPr lang="it-IT" dirty="0"/>
+          </a:p>
+          <a:p>
+            <a:r>
+              <a:rPr lang="it-IT" dirty="0"/>
+              <a:t>Tradizionalmente, il deployment soffriva della </a:t>
+            </a:r>
+            <a:r>
+              <a:rPr lang="it-IT" dirty="0">
+                <a:solidFill>
+                  <a:srgbClr val="171FE2"/>
+                </a:solidFill>
+              </a:rPr>
+              <a:t>discrepanza tra gli ambienti di sviluppo e quelli di produzione</a:t>
+            </a:r>
+            <a:r>
+              <a:rPr lang="it-IT" dirty="0"/>
+              <a:t> (versioni di librerie differenti, patch del sistema operativo mancanti).</a:t>
+            </a:r>
+          </a:p>
+          <a:p>
+            <a:endParaRPr lang="it-IT" dirty="0"/>
+          </a:p>
+          <a:p>
+            <a:r>
+              <a:rPr lang="it-IT" dirty="0">
+                <a:solidFill>
+                  <a:srgbClr val="171FE2"/>
+                </a:solidFill>
+              </a:rPr>
+              <a:t>Docker risolve radicalmente questa frizione non virtualizzando l'hardware</a:t>
+            </a:r>
+            <a:r>
+              <a:rPr lang="it-IT" dirty="0"/>
+              <a:t>, ma isolando i processi a livello software. Quindi non emula l’hardware (come accade per le Virtual Machine), né include un sistema operativo completo.</a:t>
+            </a:r>
+          </a:p>
+          <a:p>
+            <a:endParaRPr lang="it-IT" dirty="0"/>
+          </a:p>
+          <a:p>
+            <a:r>
+              <a:rPr lang="it-IT" dirty="0">
+                <a:solidFill>
+                  <a:srgbClr val="171FE2"/>
+                </a:solidFill>
+              </a:rPr>
+              <a:t>I container racchiudono l'applicazione e l'esatto ecosistema di dipendenze </a:t>
+            </a:r>
+            <a:r>
+              <a:rPr lang="it-IT" dirty="0"/>
+              <a:t>di cui ha bisogno per girare. Questo garantisce che il software si comporti in modo identico su qualsiasi macchina ospitante (Host), azzerando i tempi di configurazione.</a:t>
+            </a:r>
+          </a:p>
+          <a:p>
+            <a:endParaRPr lang="it-IT" dirty="0"/>
+          </a:p>
+          <a:p>
+            <a:r>
+              <a:rPr lang="it-IT" dirty="0"/>
+              <a:t>Docker non è nato per colmare il divario tra il mondo dello sviluppo (Dev) e quello delle operazioni sistemistiche (Ops), inaugurando di fatto l'era della metodologia </a:t>
             </a:r>
             <a:r>
               <a:rPr lang="it-IT" dirty="0" err="1"/>
@@ -10507,7 +10559,19 @@
           <a:p>
             <a:r>
               <a:rPr lang="it-IT" dirty="0"/>
-              <a:t>Quando un utente interagisce con Docker digitando un comando nel terminale, non sta operando direttamente sui processi o sui file dei container. L'infrastruttura si articola su tre componenti fondamentali che cooperano a stadi: </a:t>
+              <a:t>Quando un utente interagisce con Docker </a:t>
+            </a:r>
+            <a:r>
+              <a:rPr lang="it-IT" dirty="0">
+                <a:solidFill>
+                  <a:srgbClr val="171FE2"/>
+                </a:solidFill>
+              </a:rPr>
+              <a:t>digitando un comando nel terminale, non sta operando direttamente sui processi o sui file dei container</a:t>
+            </a:r>
+            <a:r>
+              <a:rPr lang="it-IT" dirty="0"/>
+              <a:t>. L'infrastruttura si articola su tre componenti fondamentali che cooperano a stadi: </a:t>
             </a:r>
           </a:p>
           <a:p>
@@ -10586,27 +10650,15 @@
           </a:p>
           <a:p>
             <a:r>
-              <a:rPr lang="it-IT" dirty="0">
-                <a:solidFill>
-                  <a:srgbClr val="FFC000"/>
-                </a:solidFill>
-              </a:rPr>
+              <a:rPr lang="it-IT" dirty="0"/>
               <a:t>Questo disaccoppiamento ingegneristico è talmente profondo che i tre componenti possono risiedere sulla stessa macchina locale o essere distribuiti su nodi di rete differenti: uno sviluppatore può usare la CLI dal proprio computer portatile per impartire comandi a un </a:t>
             </a:r>
             <a:r>
-              <a:rPr lang="it-IT" dirty="0" err="1">
-                <a:solidFill>
-                  <a:srgbClr val="FFC000"/>
-                </a:solidFill>
-              </a:rPr>
+              <a:rPr lang="it-IT" dirty="0" err="1"/>
               <a:t>Daemon</a:t>
             </a:r>
             <a:r>
-              <a:rPr lang="it-IT" dirty="0">
-                <a:solidFill>
-                  <a:srgbClr val="FFC000"/>
-                </a:solidFill>
-              </a:rPr>
+              <a:rPr lang="it-IT" dirty="0"/>
               <a:t> che gira su un server Linux dedicato in Cloud.</a:t>
             </a:r>
           </a:p>
@@ -11665,15 +11717,30 @@
               <a:t>Comandi come: </a:t>
             </a:r>
             <a:r>
-              <a:rPr lang="it-IT" dirty="0" err="1"/>
+              <a:rPr lang="it-IT" dirty="0" err="1">
+                <a:solidFill>
+                  <a:srgbClr val="171FE2"/>
+                </a:solidFill>
+                <a:latin typeface="Consolas" panose="020B0609020204030204" pitchFamily="49" charset="0"/>
+              </a:rPr>
               <a:t>docker</a:t>
             </a:r>
             <a:r>
-              <a:rPr lang="it-IT" dirty="0"/>
+              <a:rPr lang="it-IT" dirty="0">
+                <a:solidFill>
+                  <a:srgbClr val="171FE2"/>
+                </a:solidFill>
+                <a:latin typeface="Consolas" panose="020B0609020204030204" pitchFamily="49" charset="0"/>
+              </a:rPr>
               <a:t> </a:t>
             </a:r>
             <a:r>
-              <a:rPr lang="it-IT" dirty="0" err="1"/>
+              <a:rPr lang="it-IT" dirty="0" err="1">
+                <a:solidFill>
+                  <a:srgbClr val="171FE2"/>
+                </a:solidFill>
+                <a:latin typeface="Consolas" panose="020B0609020204030204" pitchFamily="49" charset="0"/>
+              </a:rPr>
               <a:t>run</a:t>
             </a:r>
             <a:r>
@@ -11681,15 +11748,30 @@
               <a:t>, </a:t>
             </a:r>
             <a:r>
-              <a:rPr lang="it-IT" dirty="0" err="1"/>
+              <a:rPr lang="it-IT" dirty="0" err="1">
+                <a:solidFill>
+                  <a:srgbClr val="171FE2"/>
+                </a:solidFill>
+                <a:latin typeface="Consolas" panose="020B0609020204030204" pitchFamily="49" charset="0"/>
+              </a:rPr>
               <a:t>docker</a:t>
             </a:r>
             <a:r>
-              <a:rPr lang="it-IT" dirty="0"/>
+              <a:rPr lang="it-IT" dirty="0">
+                <a:solidFill>
+                  <a:srgbClr val="171FE2"/>
+                </a:solidFill>
+                <a:latin typeface="Consolas" panose="020B0609020204030204" pitchFamily="49" charset="0"/>
+              </a:rPr>
               <a:t> </a:t>
             </a:r>
             <a:r>
-              <a:rPr lang="it-IT" dirty="0" err="1"/>
+              <a:rPr lang="it-IT" dirty="0" err="1">
+                <a:solidFill>
+                  <a:srgbClr val="171FE2"/>
+                </a:solidFill>
+                <a:latin typeface="Consolas" panose="020B0609020204030204" pitchFamily="49" charset="0"/>
+              </a:rPr>
               <a:t>ps</a:t>
             </a:r>
             <a:r>
@@ -11697,20 +11779,48 @@
               <a:t>, </a:t>
             </a:r>
             <a:r>
-              <a:rPr lang="it-IT" dirty="0" err="1"/>
+              <a:rPr lang="it-IT" dirty="0" err="1">
+                <a:solidFill>
+                  <a:srgbClr val="171FE2"/>
+                </a:solidFill>
+                <a:latin typeface="Consolas" panose="020B0609020204030204" pitchFamily="49" charset="0"/>
+              </a:rPr>
               <a:t>docker</a:t>
             </a:r>
             <a:r>
-              <a:rPr lang="it-IT" dirty="0"/>
-              <a:t> build o </a:t>
-            </a:r>
-            <a:r>
-              <a:rPr lang="it-IT" dirty="0" err="1"/>
+              <a:rPr lang="it-IT" dirty="0">
+                <a:solidFill>
+                  <a:srgbClr val="171FE2"/>
+                </a:solidFill>
+                <a:latin typeface="Consolas" panose="020B0609020204030204" pitchFamily="49" charset="0"/>
+              </a:rPr>
+              <a:t> build </a:t>
+            </a:r>
+            <a:r>
+              <a:rPr lang="it-IT" dirty="0"/>
+              <a:t>o </a:t>
+            </a:r>
+            <a:r>
+              <a:rPr lang="it-IT" dirty="0" err="1">
+                <a:solidFill>
+                  <a:srgbClr val="171FE2"/>
+                </a:solidFill>
+                <a:latin typeface="Consolas" panose="020B0609020204030204" pitchFamily="49" charset="0"/>
+              </a:rPr>
               <a:t>docker</a:t>
             </a:r>
             <a:r>
-              <a:rPr lang="it-IT" dirty="0"/>
-              <a:t> stop appartengono esclusivamente a questo strato dell'architettura. </a:t>
+              <a:rPr lang="it-IT" dirty="0">
+                <a:solidFill>
+                  <a:srgbClr val="171FE2"/>
+                </a:solidFill>
+                <a:latin typeface="Consolas" panose="020B0609020204030204" pitchFamily="49" charset="0"/>
+              </a:rPr>
+              <a:t> stop </a:t>
+            </a:r>
+            <a:r>
+              <a:rPr lang="it-IT" dirty="0"/>
+              <a:t>appartengono esclusivamente a questo strato dell'architettura. </a:t>
             </a:r>
           </a:p>
           <a:p>
@@ -11726,7 +11836,19 @@
             </a:pPr>
             <a:r>
               <a:rPr lang="it-IT" dirty="0"/>
-              <a:t>la cattura dell'input dell'utente con la conseguente validazione sintattica locale del comando</a:t>
+              <a:t>la cattura dell'input dell'utente con la conseguente </a:t>
+            </a:r>
+            <a:r>
+              <a:rPr lang="it-IT" dirty="0">
+                <a:solidFill>
+                  <a:srgbClr val="171FE2"/>
+                </a:solidFill>
+              </a:rPr>
+              <a:t>validazione sintattica </a:t>
+            </a:r>
+            <a:r>
+              <a:rPr lang="it-IT" dirty="0"/>
+              <a:t>locale del comando</a:t>
             </a:r>
           </a:p>
           <a:p>
@@ -11736,7 +11858,19 @@
             </a:pPr>
             <a:r>
               <a:rPr lang="it-IT" dirty="0"/>
-              <a:t>la traduzione di tale input in una richiesta HTTP strutturata secondo gli standard REST.</a:t>
+              <a:t>la </a:t>
+            </a:r>
+            <a:r>
+              <a:rPr lang="it-IT" dirty="0">
+                <a:solidFill>
+                  <a:srgbClr val="171FE2"/>
+                </a:solidFill>
+              </a:rPr>
+              <a:t>traduzione di tale input in una richiesta HTTP </a:t>
+            </a:r>
+            <a:r>
+              <a:rPr lang="it-IT" dirty="0"/>
+              <a:t>strutturata secondo gli standard REST.</a:t>
             </a:r>
           </a:p>
           <a:p>
@@ -11936,8 +12070,28 @@
           </a:p>
           <a:p>
             <a:r>
-              <a:rPr lang="it-IT" dirty="0"/>
-              <a:t>Gira costantemente in background come servizio del sistema operativo ospitante e rimane in ascolto permanente delle richieste HTTP provenienti dalla CLI o da altri client autorizzati. </a:t>
+              <a:rPr lang="it-IT" dirty="0">
+                <a:solidFill>
+                  <a:srgbClr val="171FE2"/>
+                </a:solidFill>
+              </a:rPr>
+              <a:t>Gira costantemente in background </a:t>
+            </a:r>
+            <a:r>
+              <a:rPr lang="it-IT" dirty="0"/>
+              <a:t>come servizio del sistema operativo ospitante e </a:t>
+            </a:r>
+            <a:r>
+              <a:rPr lang="it-IT" dirty="0">
+                <a:solidFill>
+                  <a:srgbClr val="171FE2"/>
+                </a:solidFill>
+              </a:rPr>
+              <a:t>rimane in ascolto permanente delle richieste HTTP</a:t>
+            </a:r>
+            <a:r>
+              <a:rPr lang="it-IT" dirty="0"/>
+              <a:t> provenienti dalla CLI o da altri client autorizzati. </a:t>
             </a:r>
           </a:p>
           <a:p>
@@ -12149,10 +12303,37 @@
             </a:r>
             <a:r>
               <a:rPr lang="it-IT" dirty="0"/>
-              <a:t>, la CLI intercetta il comando e genera silenziosamente una richiesta di rete di tipo GET indirizzata all'endpoint: /containers/</a:t>
-            </a:r>
-            <a:r>
-              <a:rPr lang="it-IT" dirty="0" err="1"/>
+              <a:t>, la CLI intercetta il comando e genera silenziosamente una richiesta di rete di tipo </a:t>
+            </a:r>
+            <a:r>
+              <a:rPr lang="it-IT" b="1" dirty="0">
+                <a:solidFill>
+                  <a:srgbClr val="171FE2"/>
+                </a:solidFill>
+                <a:latin typeface="Consolas" panose="020B0609020204030204" pitchFamily="49" charset="0"/>
+              </a:rPr>
+              <a:t>GET</a:t>
+            </a:r>
+            <a:r>
+              <a:rPr lang="it-IT" dirty="0"/>
+              <a:t> indirizzata all'endpoint: </a:t>
+            </a:r>
+            <a:r>
+              <a:rPr lang="it-IT" dirty="0">
+                <a:solidFill>
+                  <a:srgbClr val="171FE2"/>
+                </a:solidFill>
+                <a:latin typeface="Consolas" panose="020B0609020204030204" pitchFamily="49" charset="0"/>
+              </a:rPr>
+              <a:t>/containers/</a:t>
+            </a:r>
+            <a:r>
+              <a:rPr lang="it-IT" dirty="0" err="1">
+                <a:solidFill>
+                  <a:srgbClr val="171FE2"/>
+                </a:solidFill>
+                <a:latin typeface="Consolas" panose="020B0609020204030204" pitchFamily="49" charset="0"/>
+              </a:rPr>
               <a:t>json</a:t>
             </a:r>
             <a:r>
@@ -12171,7 +12352,13 @@
             </a:r>
             <a:r>
               <a:rPr lang="it-IT" dirty="0"/>
-              <a:t> intercetta la richiesta HTTP, interroga la propria memoria interna sullo stato dei processi attivi, e confeziona una risposta contenente un payload in formato JSON strutturato. Questo file JSON viene rispedito alla CLI, la quale ha il solo compito di fare il </a:t>
+              <a:t> intercetta la richiesta HTTP, interroga la propria memoria interna sullo stato dei processi attivi, e confeziona una risposta contenente un payload in formato JSON strutturato. </a:t>
+            </a:r>
+          </a:p>
+          <a:p>
+            <a:r>
+              <a:rPr lang="it-IT" dirty="0"/>
+              <a:t>Questo file JSON viene rispedito alla CLI, la quale ha il solo compito di fare il </a:t>
             </a:r>
             <a:r>
               <a:rPr lang="it-IT" dirty="0" err="1"/>
@@ -13569,18 +13756,6 @@
 </file>
 
 <file path=customXml/item1.xml><?xml version="1.0" encoding="utf-8"?>
-<p:properties xmlns:p="http://schemas.microsoft.com/office/2006/metadata/properties" xmlns:xsi="http://www.w3.org/2001/XMLSchema-instance" xmlns:pc="http://schemas.microsoft.com/office/infopath/2007/PartnerControls">
-  <documentManagement>
-    <TaxCatchAll xmlns="21b72fd8-e7d0-49ac-9795-d1b0bc6b7e1c" xsi:nil="true"/>
-    <lcf76f155ced4ddcb4097134ff3c332f xmlns="8b3acf13-3a58-43b2-a29e-f23503de136d">
-      <Terms xmlns="http://schemas.microsoft.com/office/infopath/2007/PartnerControls"/>
-    </lcf76f155ced4ddcb4097134ff3c332f>
-    <Argomento xmlns="8b3acf13-3a58-43b2-a29e-f23503de136d" xsi:nil="true"/>
-  </documentManagement>
-</p:properties>
-</file>
-
-<file path=customXml/item2.xml><?xml version="1.0" encoding="utf-8"?>
 <ct:contentTypeSchema xmlns:ct="http://schemas.microsoft.com/office/2006/metadata/contentType" xmlns:ma="http://schemas.microsoft.com/office/2006/metadata/properties/metaAttributes" ct:_="" ma:_="" ma:contentTypeName="Document" ma:contentTypeID="0x010100D3455C6CD0B9BF4DB2CA3009677D9668" ma:contentTypeVersion="17" ma:contentTypeDescription="Create a new document." ma:contentTypeScope="" ma:versionID="6361f2605a906a42d9630ca59d277a8b">
   <xsd:schema xmlns:xsd="http://www.w3.org/2001/XMLSchema" xmlns:xs="http://www.w3.org/2001/XMLSchema" xmlns:p="http://schemas.microsoft.com/office/2006/metadata/properties" xmlns:ns2="8b3acf13-3a58-43b2-a29e-f23503de136d" xmlns:ns3="21b72fd8-e7d0-49ac-9795-d1b0bc6b7e1c" targetNamespace="http://schemas.microsoft.com/office/2006/metadata/properties" ma:root="true" ma:fieldsID="ae4eb9e2c998b5efed80ec6126f835fa" ns2:_="" ns3:_="">
     <xsd:import namespace="8b3acf13-3a58-43b2-a29e-f23503de136d"/>
@@ -13831,7 +14006,7 @@
 </ct:contentTypeSchema>
 </file>
 
-<file path=customXml/item3.xml><?xml version="1.0" encoding="utf-8"?>
+<file path=customXml/item2.xml><?xml version="1.0" encoding="utf-8"?>
 <?mso-contentType ?>
 <FormTemplates xmlns="http://schemas.microsoft.com/sharepoint/v3/contenttype/forms">
   <Display>DocumentLibraryForm</Display>
@@ -13840,18 +14015,19 @@
 </FormTemplates>
 </file>
 
-<file path=customXml/itemProps1.xml><?xml version="1.0" encoding="utf-8"?>
-<ds:datastoreItem xmlns:ds="http://schemas.openxmlformats.org/officeDocument/2006/customXml" ds:itemID="{6766878A-54ED-4867-B478-72A29DC19B89}">
-  <ds:schemaRefs>
-    <ds:schemaRef ds:uri="http://schemas.microsoft.com/office/2006/metadata/properties"/>
-    <ds:schemaRef ds:uri="http://schemas.microsoft.com/office/infopath/2007/PartnerControls"/>
-    <ds:schemaRef ds:uri="21b72fd8-e7d0-49ac-9795-d1b0bc6b7e1c"/>
-    <ds:schemaRef ds:uri="8b3acf13-3a58-43b2-a29e-f23503de136d"/>
-  </ds:schemaRefs>
-</ds:datastoreItem>
+<file path=customXml/item3.xml><?xml version="1.0" encoding="utf-8"?>
+<p:properties xmlns:p="http://schemas.microsoft.com/office/2006/metadata/properties" xmlns:xsi="http://www.w3.org/2001/XMLSchema-instance" xmlns:pc="http://schemas.microsoft.com/office/infopath/2007/PartnerControls">
+  <documentManagement>
+    <TaxCatchAll xmlns="21b72fd8-e7d0-49ac-9795-d1b0bc6b7e1c" xsi:nil="true"/>
+    <lcf76f155ced4ddcb4097134ff3c332f xmlns="8b3acf13-3a58-43b2-a29e-f23503de136d">
+      <Terms xmlns="http://schemas.microsoft.com/office/infopath/2007/PartnerControls"/>
+    </lcf76f155ced4ddcb4097134ff3c332f>
+    <Argomento xmlns="8b3acf13-3a58-43b2-a29e-f23503de136d" xsi:nil="true"/>
+  </documentManagement>
+</p:properties>
 </file>
 
-<file path=customXml/itemProps2.xml><?xml version="1.0" encoding="utf-8"?>
+<file path=customXml/itemProps1.xml><?xml version="1.0" encoding="utf-8"?>
 <ds:datastoreItem xmlns:ds="http://schemas.openxmlformats.org/officeDocument/2006/customXml" ds:itemID="{70468F63-B318-4D5F-A1DF-86BE98AC2293}">
   <ds:schemaRefs>
     <ds:schemaRef ds:uri="http://schemas.microsoft.com/office/2006/metadata/contentType"/>
@@ -13870,10 +14046,21 @@
 </ds:datastoreItem>
 </file>
 
-<file path=customXml/itemProps3.xml><?xml version="1.0" encoding="utf-8"?>
+<file path=customXml/itemProps2.xml><?xml version="1.0" encoding="utf-8"?>
 <ds:datastoreItem xmlns:ds="http://schemas.openxmlformats.org/officeDocument/2006/customXml" ds:itemID="{67C65656-B2D8-4C19-A873-091B25A5212E}">
   <ds:schemaRefs>
     <ds:schemaRef ds:uri="http://schemas.microsoft.com/sharepoint/v3/contenttype/forms"/>
   </ds:schemaRefs>
 </ds:datastoreItem>
+</file>
+
+<file path=customXml/itemProps3.xml><?xml version="1.0" encoding="utf-8"?>
+<ds:datastoreItem xmlns:ds="http://schemas.openxmlformats.org/officeDocument/2006/customXml" ds:itemID="{6766878A-54ED-4867-B478-72A29DC19B89}">
+  <ds:schemaRefs>
+    <ds:schemaRef ds:uri="http://schemas.microsoft.com/office/2006/metadata/properties"/>
+    <ds:schemaRef ds:uri="http://schemas.microsoft.com/office/infopath/2007/PartnerControls"/>
+    <ds:schemaRef ds:uri="21b72fd8-e7d0-49ac-9795-d1b0bc6b7e1c"/>
+    <ds:schemaRef ds:uri="8b3acf13-3a58-43b2-a29e-f23503de136d"/>
+  </ds:schemaRefs>
+</ds:datastoreItem>
 </file>
--- a/1 - Introduzione a Docker.pptx
+++ b/1 - Introduzione a Docker.pptx
@@ -953,13 +953,13 @@
           <p:nvPr userDrawn="1"/>
         </p:nvPicPr>
         <p:blipFill>
-          <a:blip r:embed="rId3">
+          <a:blip>
             <a:extLst>
               <a:ext uri="{28A0092B-C50C-407E-A947-70E740481C1C}">
                 <a14:useLocalDpi xmlns:a14="http://schemas.microsoft.com/office/drawing/2010/main" val="0"/>
               </a:ext>
               <a:ext uri="{96DAC541-7B7A-43D3-8B79-37D633B846F1}">
-                <asvg:svgBlip xmlns:asvg="http://schemas.microsoft.com/office/drawing/2016/SVG/main" r:embed="rId4"/>
+                <asvg:svgBlip xmlns:asvg="http://schemas.microsoft.com/office/drawing/2016/SVG/main" r:embed="rId3"/>
               </a:ext>
             </a:extLst>
           </a:blip>
@@ -1430,14 +1430,14 @@
           <p:nvPr userDrawn="1"/>
         </p:nvPicPr>
         <p:blipFill>
-          <a:blip r:embed="rId4">
+          <a:blip>
             <a:lum bright="100000"/>
             <a:extLst>
               <a:ext uri="{28A0092B-C50C-407E-A947-70E740481C1C}">
                 <a14:useLocalDpi xmlns:a14="http://schemas.microsoft.com/office/drawing/2010/main" val="0"/>
               </a:ext>
               <a:ext uri="{96DAC541-7B7A-43D3-8B79-37D633B846F1}">
-                <asvg:svgBlip xmlns:asvg="http://schemas.microsoft.com/office/drawing/2016/SVG/main" r:embed="rId5"/>
+                <asvg:svgBlip xmlns:asvg="http://schemas.microsoft.com/office/drawing/2016/SVG/main" r:embed="rId4"/>
               </a:ext>
             </a:extLst>
           </a:blip>
@@ -1514,7 +1514,7 @@
           <p:nvPr userDrawn="1"/>
         </p:nvPicPr>
         <p:blipFill rotWithShape="1">
-          <a:blip r:embed="rId6" cstate="print"/>
+          <a:blip r:embed="rId5" cstate="print"/>
           <a:srcRect l="1386" t="187" r="342" b="95555"/>
           <a:stretch/>
         </p:blipFill>
@@ -1811,13 +1811,13 @@
           <p:nvPr userDrawn="1"/>
         </p:nvPicPr>
         <p:blipFill>
-          <a:blip r:embed="rId2">
+          <a:blip>
             <a:extLst>
               <a:ext uri="{28A0092B-C50C-407E-A947-70E740481C1C}">
                 <a14:useLocalDpi xmlns:a14="http://schemas.microsoft.com/office/drawing/2010/main" val="0"/>
               </a:ext>
               <a:ext uri="{96DAC541-7B7A-43D3-8B79-37D633B846F1}">
-                <asvg:svgBlip xmlns:asvg="http://schemas.microsoft.com/office/drawing/2016/SVG/main" r:embed="rId3"/>
+                <asvg:svgBlip xmlns:asvg="http://schemas.microsoft.com/office/drawing/2016/SVG/main" r:embed="rId2"/>
               </a:ext>
             </a:extLst>
           </a:blip>
@@ -2177,13 +2177,13 @@
           <p:nvPr userDrawn="1"/>
         </p:nvPicPr>
         <p:blipFill>
-          <a:blip r:embed="rId2">
+          <a:blip>
             <a:extLst>
               <a:ext uri="{28A0092B-C50C-407E-A947-70E740481C1C}">
                 <a14:useLocalDpi xmlns:a14="http://schemas.microsoft.com/office/drawing/2010/main" val="0"/>
               </a:ext>
               <a:ext uri="{96DAC541-7B7A-43D3-8B79-37D633B846F1}">
-                <asvg:svgBlip xmlns:asvg="http://schemas.microsoft.com/office/drawing/2016/SVG/main" r:embed="rId3"/>
+                <asvg:svgBlip xmlns:asvg="http://schemas.microsoft.com/office/drawing/2016/SVG/main" r:embed="rId2"/>
               </a:ext>
             </a:extLst>
           </a:blip>
@@ -2483,13 +2483,13 @@
           <p:nvPr userDrawn="1"/>
         </p:nvPicPr>
         <p:blipFill>
-          <a:blip r:embed="rId3">
+          <a:blip>
             <a:extLst>
               <a:ext uri="{28A0092B-C50C-407E-A947-70E740481C1C}">
                 <a14:useLocalDpi xmlns:a14="http://schemas.microsoft.com/office/drawing/2010/main" val="0"/>
               </a:ext>
               <a:ext uri="{96DAC541-7B7A-43D3-8B79-37D633B846F1}">
-                <asvg:svgBlip xmlns:asvg="http://schemas.microsoft.com/office/drawing/2016/SVG/main" r:embed="rId4"/>
+                <asvg:svgBlip xmlns:asvg="http://schemas.microsoft.com/office/drawing/2016/SVG/main" r:embed="rId3"/>
               </a:ext>
             </a:extLst>
           </a:blip>
@@ -2834,13 +2834,13 @@
           <p:nvPr userDrawn="1"/>
         </p:nvPicPr>
         <p:blipFill>
-          <a:blip r:embed="rId3">
+          <a:blip>
             <a:extLst>
               <a:ext uri="{28A0092B-C50C-407E-A947-70E740481C1C}">
                 <a14:useLocalDpi xmlns:a14="http://schemas.microsoft.com/office/drawing/2010/main" val="0"/>
               </a:ext>
               <a:ext uri="{96DAC541-7B7A-43D3-8B79-37D633B846F1}">
-                <asvg:svgBlip xmlns:asvg="http://schemas.microsoft.com/office/drawing/2016/SVG/main" r:embed="rId4"/>
+                <asvg:svgBlip xmlns:asvg="http://schemas.microsoft.com/office/drawing/2016/SVG/main" r:embed="rId3"/>
               </a:ext>
             </a:extLst>
           </a:blip>
@@ -3107,13 +3107,13 @@
           <p:nvPr userDrawn="1"/>
         </p:nvPicPr>
         <p:blipFill>
-          <a:blip r:embed="rId9">
+          <a:blip>
             <a:extLst>
               <a:ext uri="{28A0092B-C50C-407E-A947-70E740481C1C}">
                 <a14:useLocalDpi xmlns:a14="http://schemas.microsoft.com/office/drawing/2010/main" val="0"/>
               </a:ext>
               <a:ext uri="{96DAC541-7B7A-43D3-8B79-37D633B846F1}">
-                <asvg:svgBlip xmlns:asvg="http://schemas.microsoft.com/office/drawing/2016/SVG/main" r:embed="rId10"/>
+                <asvg:svgBlip xmlns:asvg="http://schemas.microsoft.com/office/drawing/2016/SVG/main" r:embed="rId9"/>
               </a:ext>
             </a:extLst>
           </a:blip>
@@ -3555,12 +3555,22 @@
             </a:r>
           </a:p>
           <a:p>
-            <a:r>
-              <a:rPr lang="it-IT" dirty="0"/>
+            <a:endParaRPr lang="it-IT" dirty="0"/>
+          </a:p>
+          <a:p>
+            <a:r>
+              <a:rPr lang="it-IT" b="1" dirty="0">
+                <a:solidFill>
+                  <a:srgbClr val="171FE2"/>
+                </a:solidFill>
+              </a:rPr>
               <a:t>Un container è un'istanza isolata in esecuzione di una specifica immagine Docker. </a:t>
             </a:r>
           </a:p>
           <a:p>
+            <a:endParaRPr lang="it-IT" dirty="0"/>
+          </a:p>
+          <a:p>
             <a:r>
               <a:rPr lang="it-IT" dirty="0"/>
               <a:t>Riprendendo un'analogia classica, se l'immagine è il progetto architettonico disegnato su carta (</a:t>
@@ -3575,10 +3585,20 @@
             </a:r>
           </a:p>
           <a:p>
-            <a:r>
-              <a:rPr lang="it-IT" dirty="0"/>
+            <a:endParaRPr lang="it-IT" dirty="0"/>
+          </a:p>
+          <a:p>
+            <a:r>
+              <a:rPr lang="it-IT" b="1" dirty="0">
+                <a:solidFill>
+                  <a:srgbClr val="171FE2"/>
+                </a:solidFill>
+              </a:rPr>
               <a:t>Dal punto di vista del sistema operativo ospitante, il container non è una macchina virtuale pesante, ma un normale processo di sistema visibile nel Task Manager o tramite il comando top. </a:t>
             </a:r>
+          </a:p>
+          <a:p>
+            <a:endParaRPr lang="it-IT" dirty="0"/>
           </a:p>
           <a:p>
             <a:r>
@@ -3707,6 +3727,9 @@
             </a:r>
           </a:p>
           <a:p>
+            <a:endParaRPr lang="it-IT" dirty="0"/>
+          </a:p>
+          <a:p>
             <a:r>
               <a:rPr lang="it-IT" dirty="0"/>
               <a:t>Il container corrisponde all'Oggetto istanziato concretamente (es. </a:t>
@@ -3719,6 +3742,9 @@
               <a:rPr lang="it-IT" dirty="0"/>
               <a:t> = new Car()). </a:t>
             </a:r>
+          </a:p>
+          <a:p>
+            <a:endParaRPr lang="it-IT" dirty="0"/>
           </a:p>
           <a:p>
             <a:r>
@@ -3739,15 +3765,7 @@
             </a:r>
             <a:r>
               <a:rPr lang="it-IT" dirty="0"/>
-              <a:t>, il motore (Docker </a:t>
-            </a:r>
-            <a:r>
-              <a:rPr lang="it-IT" dirty="0" err="1"/>
-              <a:t>Daemon</a:t>
-            </a:r>
-            <a:r>
-              <a:rPr lang="it-IT" dirty="0"/>
-              <a:t>) alloca le </a:t>
+              <a:t>, il motore (Docker Daemon) alloca le </a:t>
             </a:r>
             <a:r>
               <a:rPr lang="it-IT" dirty="0">
@@ -3769,6 +3787,9 @@
               <a:rPr lang="it-IT" dirty="0"/>
               <a:t> indipendente. </a:t>
             </a:r>
+          </a:p>
+          <a:p>
+            <a:endParaRPr lang="it-IT" dirty="0"/>
           </a:p>
           <a:p>
             <a:r>
@@ -3946,49 +3967,120 @@
             </a:r>
             <a:r>
               <a:rPr lang="it-IT" dirty="0"/>
-              <a:t>è il comando più utilizzato in Docker, ma sotto la sua apparenza semplice nasconde un flusso di lavoro sequenziale che unisce tre comandi atomici distinti. </a:t>
-            </a:r>
-          </a:p>
-          <a:p>
-            <a:r>
-              <a:rPr lang="it-IT" dirty="0"/>
-              <a:t>Quando lo digitiamo, il </a:t>
-            </a:r>
-            <a:r>
-              <a:rPr lang="it-IT" dirty="0" err="1"/>
-              <a:t>Daemon</a:t>
-            </a:r>
-            <a:r>
-              <a:rPr lang="it-IT" dirty="0"/>
-              <a:t> esegue la seguente sequenza: </a:t>
-            </a:r>
-          </a:p>
-          <a:p>
-            <a:r>
-              <a:rPr lang="it-IT" dirty="0"/>
-              <a:t>per prima cosa interroga i cataloghi dello storage locale per verificare se l'immagine richiesta sia presente; se l'immagine non c'è, invoca internamente un comando di </a:t>
-            </a:r>
-            <a:r>
-              <a:rPr lang="it-IT" dirty="0" err="1"/>
+              <a:t>è il comando più utilizzato in Docker che unisce tre comandi atomici distinti. </a:t>
+            </a:r>
+          </a:p>
+          <a:p>
+            <a:endParaRPr lang="it-IT" dirty="0"/>
+          </a:p>
+          <a:p>
+            <a:r>
+              <a:rPr lang="it-IT" dirty="0"/>
+              <a:t>Quando lo digitiamo, il Daemon esegue la seguente sequenza: </a:t>
+            </a:r>
+          </a:p>
+          <a:p>
+            <a:pPr marL="285750" indent="-285750">
+              <a:buFont typeface="Arial" panose="020B0604020202020204" pitchFamily="34" charset="0"/>
+              <a:buChar char="•"/>
+            </a:pPr>
+            <a:r>
+              <a:rPr lang="it-IT" dirty="0"/>
+              <a:t>per prima cosa </a:t>
+            </a:r>
+            <a:r>
+              <a:rPr lang="it-IT" b="1" dirty="0">
+                <a:solidFill>
+                  <a:srgbClr val="171FE2"/>
+                </a:solidFill>
+              </a:rPr>
+              <a:t>interroga i cataloghi </a:t>
+            </a:r>
+            <a:r>
+              <a:rPr lang="it-IT" dirty="0">
+                <a:solidFill>
+                  <a:srgbClr val="171FE2"/>
+                </a:solidFill>
+              </a:rPr>
+              <a:t>dello storage locale </a:t>
+            </a:r>
+            <a:r>
+              <a:rPr lang="it-IT" dirty="0"/>
+              <a:t>per verificare se l'immagine richiesta sia presente; se l'immagine non c'è, invoca internamente un comando di </a:t>
+            </a:r>
+            <a:r>
+              <a:rPr lang="it-IT" b="1" dirty="0" err="1">
+                <a:solidFill>
+                  <a:srgbClr val="171FE2"/>
+                </a:solidFill>
+              </a:rPr>
               <a:t>docker</a:t>
             </a:r>
             <a:r>
-              <a:rPr lang="it-IT" dirty="0"/>
-              <a:t> pull per scaricarla dal cloud (Docker HUB).</a:t>
-            </a:r>
-          </a:p>
-          <a:p>
+              <a:rPr lang="it-IT" b="1" dirty="0">
+                <a:solidFill>
+                  <a:srgbClr val="171FE2"/>
+                </a:solidFill>
+              </a:rPr>
+              <a:t> pull </a:t>
+            </a:r>
+            <a:r>
+              <a:rPr lang="it-IT" dirty="0"/>
+              <a:t>per scaricarla dal cloud (</a:t>
+            </a:r>
+            <a:r>
+              <a:rPr lang="it-IT" b="1" dirty="0">
+                <a:solidFill>
+                  <a:srgbClr val="171FE2"/>
+                </a:solidFill>
+              </a:rPr>
+              <a:t>Docker HUB</a:t>
+            </a:r>
+            <a:r>
+              <a:rPr lang="it-IT" dirty="0"/>
+              <a:t>).</a:t>
+            </a:r>
+          </a:p>
+          <a:p>
+            <a:pPr marL="285750" indent="-285750">
+              <a:buFont typeface="Arial" panose="020B0604020202020204" pitchFamily="34" charset="0"/>
+              <a:buChar char="•"/>
+            </a:pPr>
             <a:r>
               <a:rPr lang="it-IT" dirty="0"/>
               <a:t>Successivamente, esegue un </a:t>
             </a:r>
             <a:r>
-              <a:rPr lang="it-IT" dirty="0" err="1"/>
+              <a:rPr lang="it-IT" b="1" dirty="0" err="1">
+                <a:solidFill>
+                  <a:srgbClr val="171FE2"/>
+                </a:solidFill>
+              </a:rPr>
               <a:t>docker</a:t>
             </a:r>
             <a:r>
-              <a:rPr lang="it-IT" dirty="0"/>
-              <a:t> create: alloca lo spazio su disco, imposta le configurazioni e prepara il perimetro isolato, generando un container in stato "</a:t>
+              <a:rPr lang="it-IT" b="1" dirty="0">
+                <a:solidFill>
+                  <a:srgbClr val="171FE2"/>
+                </a:solidFill>
+              </a:rPr>
+              <a:t> create</a:t>
+            </a:r>
+            <a:r>
+              <a:rPr lang="it-IT" dirty="0"/>
+              <a:t>: alloca lo spazio su disco, imposta le configurazioni e prepara il perimetro isolato, </a:t>
+            </a:r>
+            <a:r>
+              <a:rPr lang="it-IT" dirty="0">
+                <a:solidFill>
+                  <a:srgbClr val="171FE2"/>
+                </a:solidFill>
+              </a:rPr>
+              <a:t>generando un container </a:t>
+            </a:r>
+            <a:r>
+              <a:rPr lang="it-IT" dirty="0"/>
+              <a:t>in stato "</a:t>
             </a:r>
             <a:r>
               <a:rPr lang="it-IT" dirty="0" err="1"/>
@@ -4000,20 +4092,52 @@
             </a:r>
           </a:p>
           <a:p>
+            <a:pPr marL="285750" indent="-285750">
+              <a:buFont typeface="Arial" panose="020B0604020202020204" pitchFamily="34" charset="0"/>
+              <a:buChar char="•"/>
+            </a:pPr>
             <a:r>
               <a:rPr lang="it-IT" dirty="0"/>
               <a:t>Infine, invoca un </a:t>
             </a:r>
             <a:r>
-              <a:rPr lang="it-IT" dirty="0" err="1"/>
+              <a:rPr lang="it-IT" b="1" dirty="0" err="1">
+                <a:solidFill>
+                  <a:srgbClr val="171FE2"/>
+                </a:solidFill>
+              </a:rPr>
               <a:t>docker</a:t>
             </a:r>
             <a:r>
-              <a:rPr lang="it-IT" dirty="0"/>
-              <a:t> start, il quale accende i motori del container, aggancia i canali di input/output e avvia il processo principale configurato nel metadato dell'immagine.</a:t>
-            </a:r>
-          </a:p>
-          <a:p>
+              <a:rPr lang="it-IT" b="1" dirty="0">
+                <a:solidFill>
+                  <a:srgbClr val="171FE2"/>
+                </a:solidFill>
+              </a:rPr>
+              <a:t> start</a:t>
+            </a:r>
+            <a:r>
+              <a:rPr lang="it-IT" dirty="0"/>
+              <a:t>, il quale accende i motori del container, aggancia i canali di input/output e </a:t>
+            </a:r>
+            <a:r>
+              <a:rPr lang="it-IT" dirty="0">
+                <a:solidFill>
+                  <a:srgbClr val="171FE2"/>
+                </a:solidFill>
+              </a:rPr>
+              <a:t>avvia il processo principale </a:t>
+            </a:r>
+            <a:r>
+              <a:rPr lang="it-IT" dirty="0"/>
+              <a:t>configurato nel metadato dell'immagine.</a:t>
+            </a:r>
+          </a:p>
+          <a:p>
+            <a:pPr marL="285750" indent="-285750">
+              <a:buFont typeface="Arial" panose="020B0604020202020204" pitchFamily="34" charset="0"/>
+              <a:buChar char="•"/>
+            </a:pPr>
             <a:r>
               <a:rPr lang="it-IT" dirty="0"/>
               <a:t>"</a:t>
@@ -4032,7 +4156,19 @@
             </a:r>
             <a:r>
               <a:rPr lang="it-IT" dirty="0"/>
-              <a:t>" è un comando "macro". Conoscere la triade (Pull -&gt; Create -&gt; Start) è fondamentale per capire lo stato dei container e diagnosticare i problemi quando un container fallisce l'avvio.</a:t>
+              <a:t>" è un comando "macro". Conoscere la triade </a:t>
+            </a:r>
+            <a:r>
+              <a:rPr lang="it-IT" b="1" dirty="0">
+                <a:solidFill>
+                  <a:srgbClr val="171FE2"/>
+                </a:solidFill>
+              </a:rPr>
+              <a:t>(Pull -&gt; Create -&gt; Start) </a:t>
+            </a:r>
+            <a:r>
+              <a:rPr lang="it-IT" dirty="0"/>
+              <a:t>è fondamentale per capire lo stato dei container e diagnosticare i problemi quando un container fallisce l'avvio.</a:t>
             </a:r>
           </a:p>
         </p:txBody>
@@ -4152,14 +4288,44 @@
           <a:p>
             <a:r>
               <a:rPr lang="it-IT" dirty="0"/>
-              <a:t>I container non potrebbero essere distribuiti globalmente senza un'infrastruttura di catalogazione dei file.</a:t>
-            </a:r>
-          </a:p>
-          <a:p>
-            <a:r>
-              <a:rPr lang="it-IT" dirty="0"/>
-              <a:t>Questo ruolo è ricoperto da Docker Hub, il registro pubblico, ufficiale e centralizzato basato sul Cloud in cui vengono memorizzate, indicizzate e distribuite le immagini dei container. </a:t>
-            </a:r>
+              <a:t>I container non potrebbero essere distribuiti globalmente senza un'infrastruttura di </a:t>
+            </a:r>
+            <a:r>
+              <a:rPr lang="it-IT" b="1" dirty="0">
+                <a:solidFill>
+                  <a:srgbClr val="171FE2"/>
+                </a:solidFill>
+              </a:rPr>
+              <a:t>catalogazione dei file</a:t>
+            </a:r>
+            <a:r>
+              <a:rPr lang="it-IT" dirty="0"/>
+              <a:t>.</a:t>
+            </a:r>
+          </a:p>
+          <a:p>
+            <a:endParaRPr lang="it-IT" dirty="0"/>
+          </a:p>
+          <a:p>
+            <a:r>
+              <a:rPr lang="it-IT" dirty="0"/>
+              <a:t>Questo ruolo è ricoperto da Docker Hub, il </a:t>
+            </a:r>
+            <a:r>
+              <a:rPr lang="it-IT" b="1" dirty="0">
+                <a:solidFill>
+                  <a:srgbClr val="171FE2"/>
+                </a:solidFill>
+              </a:rPr>
+              <a:t>registro pubblico</a:t>
+            </a:r>
+            <a:r>
+              <a:rPr lang="it-IT" dirty="0"/>
+              <a:t>, ufficiale e centralizzato basato sul Cloud in cui vengono memorizzate, indicizzate e distribuite le immagini dei container. </a:t>
+            </a:r>
+          </a:p>
+          <a:p>
+            <a:endParaRPr lang="it-IT" dirty="0"/>
           </a:p>
           <a:p>
             <a:r>
@@ -4168,10 +4334,40 @@
             </a:r>
           </a:p>
           <a:p>
-            <a:r>
-              <a:rPr lang="it-IT" dirty="0"/>
-              <a:t>Contiene decine di migliaia di immagini pronte all'uso, suddivise tra immagini ufficiali (curate direttamente dai team di sviluppo di tecnologie leader come Oracle per Java, l'organizzazione Apache, o il team di Microsoft per SQL Server) e immagini create dalla community. </a:t>
-            </a:r>
+            <a:endParaRPr lang="it-IT" dirty="0"/>
+          </a:p>
+          <a:p>
+            <a:r>
+              <a:rPr lang="it-IT" dirty="0"/>
+              <a:t>Contiene decine di migliaia di immagini pronte all'uso, </a:t>
+            </a:r>
+            <a:r>
+              <a:rPr lang="it-IT" dirty="0">
+                <a:solidFill>
+                  <a:srgbClr val="171FE2"/>
+                </a:solidFill>
+              </a:rPr>
+              <a:t>suddivise tra immagini ufficiali </a:t>
+            </a:r>
+            <a:r>
+              <a:rPr lang="it-IT" dirty="0"/>
+              <a:t>(curate direttamente dai team di sviluppo di tecnologie leader come Oracle per Java, l'organizzazione Apache, o il team di Microsoft per SQL Server) e </a:t>
+            </a:r>
+            <a:r>
+              <a:rPr lang="it-IT" dirty="0">
+                <a:solidFill>
+                  <a:srgbClr val="171FE2"/>
+                </a:solidFill>
+              </a:rPr>
+              <a:t>immagini create dalla community</a:t>
+            </a:r>
+            <a:r>
+              <a:rPr lang="it-IT" dirty="0"/>
+              <a:t>. </a:t>
+            </a:r>
+          </a:p>
+          <a:p>
+            <a:endParaRPr lang="it-IT" dirty="0"/>
           </a:p>
           <a:p>
             <a:r>
@@ -4327,20 +4523,24 @@
               <a:t>Sebbene il comando </a:t>
             </a:r>
             <a:r>
-              <a:rPr lang="it-IT" dirty="0" err="1"/>
+              <a:rPr lang="it-IT" b="1" dirty="0" err="1"/>
               <a:t>docker</a:t>
             </a:r>
             <a:r>
-              <a:rPr lang="it-IT" dirty="0"/>
+              <a:rPr lang="it-IT" b="1" dirty="0"/>
               <a:t> </a:t>
             </a:r>
             <a:r>
-              <a:rPr lang="it-IT" dirty="0" err="1"/>
+              <a:rPr lang="it-IT" b="1" dirty="0" err="1"/>
               <a:t>run</a:t>
             </a:r>
             <a:r>
-              <a:rPr lang="it-IT" dirty="0"/>
-              <a:t> sia in grado di scaricare autonomamente le immagini mancanti da Docker Hub, l'utilizzo esplicito e preventivo del comando </a:t>
+              <a:rPr lang="it-IT" b="1" dirty="0"/>
+              <a:t> </a:t>
+            </a:r>
+            <a:r>
+              <a:rPr lang="it-IT" dirty="0"/>
+              <a:t>sia in grado di scaricare autonomamente le immagini mancanti da Docker Hub, l'utilizzo esplicito e preventivo del comando </a:t>
             </a:r>
             <a:r>
               <a:rPr lang="it-IT" b="1" dirty="0" err="1">
@@ -4373,16 +4573,44 @@
           </a:p>
           <a:p>
             <a:r>
-              <a:rPr lang="it-IT" dirty="0"/>
+              <a:rPr lang="it-IT" dirty="0">
+                <a:solidFill>
+                  <a:srgbClr val="171FE2"/>
+                </a:solidFill>
+              </a:rPr>
               <a:t>Il comando pull ha il compito esclusivo di contattare il registro remoto (Docker HUB), verificare la disponibilità dell'immagine e scaricarla nello storage locale </a:t>
             </a:r>
             <a:r>
-              <a:rPr lang="it-IT" dirty="0" err="1"/>
+              <a:rPr lang="it-IT" dirty="0" err="1">
+                <a:solidFill>
+                  <a:srgbClr val="171FE2"/>
+                </a:solidFill>
+              </a:rPr>
               <a:t>dell'host</a:t>
             </a:r>
             <a:r>
-              <a:rPr lang="it-IT" dirty="0"/>
-              <a:t>, senza avviarla in memoria. </a:t>
+              <a:rPr lang="it-IT" dirty="0">
+                <a:solidFill>
+                  <a:srgbClr val="171FE2"/>
+                </a:solidFill>
+              </a:rPr>
+              <a:t>, </a:t>
+            </a:r>
+            <a:r>
+              <a:rPr lang="it-IT" b="1" dirty="0">
+                <a:solidFill>
+                  <a:srgbClr val="171FE2"/>
+                </a:solidFill>
+              </a:rPr>
+              <a:t>senza avviarla </a:t>
+            </a:r>
+            <a:r>
+              <a:rPr lang="it-IT" dirty="0">
+                <a:solidFill>
+                  <a:srgbClr val="171FE2"/>
+                </a:solidFill>
+              </a:rPr>
+              <a:t>in memoria. </a:t>
             </a:r>
           </a:p>
           <a:p>
@@ -4398,7 +4626,19 @@
             </a:pPr>
             <a:r>
               <a:rPr lang="it-IT" dirty="0"/>
-              <a:t>durante le finestre di manutenzione notturna dei server (per scaricare i file pesanti in anticipo);</a:t>
+              <a:t>durante le finestre di manutenzione notturna dei server (per </a:t>
+            </a:r>
+            <a:r>
+              <a:rPr lang="it-IT" b="1" dirty="0">
+                <a:solidFill>
+                  <a:srgbClr val="171FE2"/>
+                </a:solidFill>
+              </a:rPr>
+              <a:t>scaricare i file pesanti in anticipo</a:t>
+            </a:r>
+            <a:r>
+              <a:rPr lang="it-IT" dirty="0"/>
+              <a:t>);</a:t>
             </a:r>
           </a:p>
           <a:p>
@@ -4407,8 +4647,16 @@
               <a:buChar char="•"/>
             </a:pPr>
             <a:r>
-              <a:rPr lang="it-IT" dirty="0"/>
-              <a:t>per aggiornare un'immagine locale all'ultima versione stabile pubblicata nel cloud (sostituendo la versione vecchia con la nuova); </a:t>
+              <a:rPr lang="it-IT" b="1" dirty="0">
+                <a:solidFill>
+                  <a:srgbClr val="171FE2"/>
+                </a:solidFill>
+              </a:rPr>
+              <a:t>per aggiornare un'immagine locale all'ultima versione </a:t>
+            </a:r>
+            <a:r>
+              <a:rPr lang="it-IT" dirty="0"/>
+              <a:t>stabile pubblicata nel cloud (sostituendo la versione vecchia con la nuova); </a:t>
             </a:r>
           </a:p>
           <a:p>
@@ -4442,8 +4690,10 @@
               <a:rPr lang="it-IT" dirty="0"/>
               <a:t>. </a:t>
             </a:r>
-            <a:r>
-              <a:rPr lang="it-IT" dirty="0">
+          </a:p>
+          <a:p>
+            <a:r>
+              <a:rPr lang="it-IT" b="1" dirty="0">
                 <a:solidFill>
                   <a:srgbClr val="171FE2"/>
                 </a:solidFill>
@@ -4451,7 +4701,7 @@
               <a:t>Se un'immagine pesa 1GB, fare "</a:t>
             </a:r>
             <a:r>
-              <a:rPr lang="it-IT" dirty="0" err="1">
+              <a:rPr lang="it-IT" b="1" dirty="0" err="1">
                 <a:solidFill>
                   <a:srgbClr val="171FE2"/>
                 </a:solidFill>
@@ -4459,7 +4709,7 @@
               <a:t>docker</a:t>
             </a:r>
             <a:r>
-              <a:rPr lang="it-IT" dirty="0">
+              <a:rPr lang="it-IT" b="1" dirty="0">
                 <a:solidFill>
                   <a:srgbClr val="171FE2"/>
                 </a:solidFill>
@@ -4467,7 +4717,7 @@
               <a:t> </a:t>
             </a:r>
             <a:r>
-              <a:rPr lang="it-IT" dirty="0" err="1">
+              <a:rPr lang="it-IT" b="1" dirty="0" err="1">
                 <a:solidFill>
                   <a:srgbClr val="171FE2"/>
                 </a:solidFill>
@@ -4475,7 +4725,7 @@
               <a:t>run</a:t>
             </a:r>
             <a:r>
-              <a:rPr lang="it-IT" dirty="0">
+              <a:rPr lang="it-IT" b="1" dirty="0">
                 <a:solidFill>
                   <a:srgbClr val="171FE2"/>
                 </a:solidFill>
@@ -4608,7 +4858,19 @@
           <a:p>
             <a:r>
               <a:rPr lang="it-IT" dirty="0"/>
-              <a:t>L'inganno visivo di Docker, che fa apparire un container come se fosse una macchina virtuale indipendente, è reso possibile da una funzionalità nativa del kernel Linux introdotta a partire dai primi anni 2000: i </a:t>
+              <a:t>L'inganno visivo di Docker, che fa apparire un container come se fosse una macchina virtuale indipendente, è reso possibile da una </a:t>
+            </a:r>
+            <a:r>
+              <a:rPr lang="it-IT" b="1" dirty="0">
+                <a:solidFill>
+                  <a:srgbClr val="171FE2"/>
+                </a:solidFill>
+              </a:rPr>
+              <a:t>funzionalità nativa del kernel Linux </a:t>
+            </a:r>
+            <a:r>
+              <a:rPr lang="it-IT" dirty="0"/>
+              <a:t>introdotta a partire dai primi anni 2000: i </a:t>
             </a:r>
             <a:r>
               <a:rPr lang="it-IT" dirty="0" err="1"/>
@@ -4755,16 +5017,44 @@
           </a:p>
           <a:p>
             <a:r>
-              <a:rPr lang="it-IT" dirty="0"/>
+              <a:rPr lang="it-IT" b="1" dirty="0">
+                <a:solidFill>
+                  <a:srgbClr val="171FE2"/>
+                </a:solidFill>
+              </a:rPr>
               <a:t>I </a:t>
             </a:r>
             <a:r>
-              <a:rPr lang="it-IT" dirty="0" err="1"/>
+              <a:rPr lang="it-IT" b="1" dirty="0" err="1">
+                <a:solidFill>
+                  <a:srgbClr val="171FE2"/>
+                </a:solidFill>
+              </a:rPr>
               <a:t>Namespaces</a:t>
             </a:r>
             <a:r>
-              <a:rPr lang="it-IT" dirty="0"/>
-              <a:t> rispondono alla domanda di sicurezza: "Quali risorse del sistema ho il diritto di vedere?". Essi creano l'illusione ottica di un sistema operativo dedicato.</a:t>
+              <a:rPr lang="it-IT" b="1" dirty="0">
+                <a:solidFill>
+                  <a:srgbClr val="171FE2"/>
+                </a:solidFill>
+              </a:rPr>
+              <a:t> </a:t>
+            </a:r>
+            <a:r>
+              <a:rPr lang="it-IT" dirty="0"/>
+              <a:t>rispondono alla domanda di sicurezza: "Quali risorse del sistema ho il diritto di vedere?". Essi </a:t>
+            </a:r>
+            <a:r>
+              <a:rPr lang="it-IT" b="1" dirty="0">
+                <a:solidFill>
+                  <a:srgbClr val="171FE2"/>
+                </a:solidFill>
+              </a:rPr>
+              <a:t>creano l'illusione ottica di un sistema operativo dedicato</a:t>
+            </a:r>
+            <a:r>
+              <a:rPr lang="it-IT" dirty="0"/>
+              <a:t>.</a:t>
             </a:r>
             <a:endParaRPr lang="it-IT" dirty="0">
               <a:solidFill>
@@ -4897,8 +5187,23 @@
             </a:r>
             <a:r>
               <a:rPr lang="it-IT" dirty="0"/>
-              <a:t> garantiscono che un container non possa vedere o interferire con i dati altrui, essi non offrono alcuna protezione contro l'esaurimento delle risorse fisiche dell'hardware (CPU, RAM, disco). </a:t>
-            </a:r>
+              <a:t> garantiscono che un container non possa vedere o interferire con i dati altrui, essi </a:t>
+            </a:r>
+            <a:r>
+              <a:rPr lang="it-IT" dirty="0">
+                <a:solidFill>
+                  <a:srgbClr val="171FE2"/>
+                </a:solidFill>
+              </a:rPr>
+              <a:t>non offrono alcuna protezione contro l'esaurimento delle risorse fisiche dell'hardware </a:t>
+            </a:r>
+            <a:r>
+              <a:rPr lang="it-IT" dirty="0"/>
+              <a:t>(CPU, RAM, disco). </a:t>
+            </a:r>
+          </a:p>
+          <a:p>
+            <a:endParaRPr lang="it-IT" dirty="0"/>
           </a:p>
           <a:p>
             <a:r>
@@ -4915,9 +5220,24 @@
             </a:r>
           </a:p>
           <a:p>
-            <a:r>
-              <a:rPr lang="it-IT" dirty="0"/>
-              <a:t>Per prevenire questo scenario catastrofico, Docker implementa una seconda tecnologia nativa del kernel Linux denominata </a:t>
+            <a:endParaRPr lang="it-IT" dirty="0"/>
+          </a:p>
+          <a:p>
+            <a:r>
+              <a:rPr lang="it-IT" dirty="0"/>
+              <a:t>Per prevenire questo scenario catastrofico, Docker implementa una </a:t>
+            </a:r>
+            <a:r>
+              <a:rPr lang="it-IT" dirty="0">
+                <a:solidFill>
+                  <a:srgbClr val="171FE2"/>
+                </a:solidFill>
+              </a:rPr>
+              <a:t>seconda tecnologia nativa del kernel Linux</a:t>
+            </a:r>
+            <a:r>
+              <a:rPr lang="it-IT" dirty="0"/>
+              <a:t> denominata </a:t>
             </a:r>
             <a:r>
               <a:rPr lang="it-IT" b="1" dirty="0"/>
@@ -4937,6 +5257,9 @@
             </a:r>
           </a:p>
           <a:p>
+            <a:endParaRPr lang="it-IT" dirty="0"/>
+          </a:p>
+          <a:p>
             <a:r>
               <a:rPr lang="it-IT" dirty="0"/>
               <a:t>I </a:t>
@@ -4947,16 +5270,23 @@
             </a:r>
             <a:r>
               <a:rPr lang="it-IT" dirty="0"/>
-              <a:t> agiscono come una vera e propria dogana hardware. Permettono al Docker </a:t>
-            </a:r>
-            <a:r>
-              <a:rPr lang="it-IT" dirty="0" err="1"/>
-              <a:t>Daemon</a:t>
-            </a:r>
-            <a:r>
-              <a:rPr lang="it-IT" dirty="0"/>
-              <a:t> di stabilire barriere fisiche invalicabili per ogni singolo container. </a:t>
-            </a:r>
+              <a:t> agiscono come una vera e propria dogana hardware. </a:t>
+            </a:r>
+            <a:r>
+              <a:rPr lang="it-IT" dirty="0">
+                <a:solidFill>
+                  <a:srgbClr val="171FE2"/>
+                </a:solidFill>
+              </a:rPr>
+              <a:t>Permettono al Docker Daemon di stabilire barriere fisiche invalicabili per ogni singolo container</a:t>
+            </a:r>
+            <a:r>
+              <a:rPr lang="it-IT" dirty="0"/>
+              <a:t>. </a:t>
+            </a:r>
+          </a:p>
+          <a:p>
+            <a:endParaRPr lang="it-IT" dirty="0"/>
           </a:p>
           <a:p>
             <a:r>
@@ -5118,7 +5448,19 @@
           <a:p>
             <a:r>
               <a:rPr lang="it-IT" dirty="0"/>
-              <a:t>L'architettura di una Macchina Virtuale (VM) poggia su uno strato software pesante chiamato </a:t>
+              <a:t>L'architettura di una Macchina Virtuale (VM) poggia su </a:t>
+            </a:r>
+            <a:r>
+              <a:rPr lang="it-IT" b="1" dirty="0">
+                <a:solidFill>
+                  <a:srgbClr val="171FE2"/>
+                </a:solidFill>
+              </a:rPr>
+              <a:t>uno strato software pesante </a:t>
+            </a:r>
+            <a:r>
+              <a:rPr lang="it-IT" dirty="0"/>
+              <a:t>chiamato </a:t>
             </a:r>
             <a:r>
               <a:rPr lang="it-IT" dirty="0" err="1"/>
@@ -5146,10 +5488,28 @@
             </a:r>
           </a:p>
           <a:p>
-            <a:r>
-              <a:rPr lang="it-IT" dirty="0"/>
-              <a:t>Sopra l'hardware finto, ogni VM deve installare un Sistema Operativo Ospite (Guest OS) completo di kernel, driver e utility di sistema, occupando immediatamente gigabyte di spazio su disco e centinaia di megabyte di RAM statica solo per rimanere accesa. </a:t>
-            </a:r>
+            <a:endParaRPr lang="it-IT" dirty="0"/>
+          </a:p>
+          <a:p>
+            <a:r>
+              <a:rPr lang="it-IT" dirty="0"/>
+              <a:t>Sopra l'hardware finto, </a:t>
+            </a:r>
+            <a:r>
+              <a:rPr lang="it-IT" b="1" dirty="0">
+                <a:solidFill>
+                  <a:srgbClr val="171FE2"/>
+                </a:solidFill>
+              </a:rPr>
+              <a:t>ogni VM deve installare un Sistema Operativo Ospite (Guest OS) completo di kernel, driver e utility di sistema</a:t>
+            </a:r>
+            <a:r>
+              <a:rPr lang="it-IT" dirty="0"/>
+              <a:t>, occupando immediatamente gigabyte di spazio su disco e centinaia di megabyte di RAM statica solo per rimanere accesa. </a:t>
+            </a:r>
+          </a:p>
+          <a:p>
+            <a:endParaRPr lang="it-IT" dirty="0"/>
           </a:p>
           <a:p>
             <a:r>
@@ -5166,12 +5526,23 @@
             </a:r>
           </a:p>
           <a:p>
-            <a:r>
-              <a:rPr lang="it-IT" dirty="0"/>
+            <a:endParaRPr lang="it-IT" dirty="0"/>
+          </a:p>
+          <a:p>
+            <a:r>
+              <a:rPr lang="it-IT" dirty="0">
+                <a:solidFill>
+                  <a:srgbClr val="171FE2"/>
+                </a:solidFill>
+              </a:rPr>
               <a:t>Tutti i container condividono lo stesso kernel della macchina </a:t>
             </a:r>
             <a:r>
-              <a:rPr lang="it-IT" dirty="0" err="1"/>
+              <a:rPr lang="it-IT" dirty="0" err="1">
+                <a:solidFill>
+                  <a:srgbClr val="171FE2"/>
+                </a:solidFill>
+              </a:rPr>
               <a:t>host</a:t>
             </a:r>
             <a:r>
@@ -5186,6 +5557,9 @@
               <a:rPr lang="it-IT" dirty="0"/>
               <a:t>, azzerando i consumi inutili di RAM e CPU.</a:t>
             </a:r>
+          </a:p>
+          <a:p>
+            <a:endParaRPr lang="it-IT" dirty="0"/>
           </a:p>
           <a:p>
             <a:r>
@@ -5319,46 +5693,110 @@
             </a:r>
           </a:p>
           <a:p>
-            <a:r>
-              <a:rPr lang="it-IT" dirty="0"/>
-              <a:t>Nel contesto della containerizzazione, il filesystem rappresenta la struttura gerarchica ad albero organizzata in cartelle e file (la classica radice Linux / corredata dalle sue sottocartelle standard come /</a:t>
-            </a:r>
-            <a:r>
-              <a:rPr lang="it-IT" dirty="0" err="1"/>
+            <a:endParaRPr lang="it-IT" dirty="0"/>
+          </a:p>
+          <a:p>
+            <a:r>
+              <a:rPr lang="it-IT" dirty="0"/>
+              <a:t>Nel contesto della containerizzazione, </a:t>
+            </a:r>
+            <a:r>
+              <a:rPr lang="it-IT" dirty="0">
+                <a:solidFill>
+                  <a:srgbClr val="171FE2"/>
+                </a:solidFill>
+              </a:rPr>
+              <a:t>il filesystem rappresenta </a:t>
+            </a:r>
+            <a:r>
+              <a:rPr lang="it-IT" dirty="0"/>
+              <a:t>la struttura gerarchica ad albero organizzata in cartelle e file (</a:t>
+            </a:r>
+            <a:r>
+              <a:rPr lang="it-IT" dirty="0">
+                <a:solidFill>
+                  <a:srgbClr val="171FE2"/>
+                </a:solidFill>
+              </a:rPr>
+              <a:t>la classica radice Linux </a:t>
+            </a:r>
+            <a:r>
+              <a:rPr lang="it-IT" dirty="0"/>
+              <a:t>/ corredata dalle sue sottocartelle standard come </a:t>
+            </a:r>
+            <a:r>
+              <a:rPr lang="it-IT" dirty="0">
+                <a:solidFill>
+                  <a:srgbClr val="171FE2"/>
+                </a:solidFill>
+              </a:rPr>
+              <a:t>/</a:t>
+            </a:r>
+            <a:r>
+              <a:rPr lang="it-IT" dirty="0" err="1">
+                <a:solidFill>
+                  <a:srgbClr val="171FE2"/>
+                </a:solidFill>
+              </a:rPr>
               <a:t>usr</a:t>
             </a:r>
             <a:r>
-              <a:rPr lang="it-IT" dirty="0"/>
+              <a:rPr lang="it-IT" dirty="0">
+                <a:solidFill>
+                  <a:srgbClr val="171FE2"/>
+                </a:solidFill>
+              </a:rPr>
               <a:t>, /var, /</a:t>
             </a:r>
             <a:r>
-              <a:rPr lang="it-IT" dirty="0" err="1"/>
+              <a:rPr lang="it-IT" dirty="0" err="1">
+                <a:solidFill>
+                  <a:srgbClr val="171FE2"/>
+                </a:solidFill>
+              </a:rPr>
               <a:t>etc</a:t>
             </a:r>
             <a:r>
-              <a:rPr lang="it-IT" dirty="0"/>
-              <a:t>, /app) che l'applicazione sperimenta come proprio hard disk privato. </a:t>
-            </a:r>
-          </a:p>
-          <a:p>
-            <a:r>
-              <a:rPr lang="it-IT" dirty="0"/>
-              <a:t>Ogni immagine Docker racchiude al suo interno un filesystem nativo preconfezionato. </a:t>
-            </a:r>
-          </a:p>
-          <a:p>
-            <a:r>
-              <a:rPr lang="it-IT" dirty="0"/>
-              <a:t>Quando il Docker </a:t>
-            </a:r>
-            <a:r>
-              <a:rPr lang="it-IT" dirty="0" err="1"/>
-              <a:t>Daemon</a:t>
-            </a:r>
-            <a:r>
-              <a:rPr lang="it-IT" dirty="0"/>
-              <a:t> avvia il processo interno del container, gli impone questo filesystem isolato come unica realtà visibile. </a:t>
-            </a:r>
+              <a:rPr lang="it-IT" dirty="0">
+                <a:solidFill>
+                  <a:srgbClr val="171FE2"/>
+                </a:solidFill>
+              </a:rPr>
+              <a:t>, /app</a:t>
+            </a:r>
+            <a:r>
+              <a:rPr lang="it-IT" dirty="0"/>
+              <a:t>) che l'applicazione sperimenta come proprio hard disk privato. </a:t>
+            </a:r>
+          </a:p>
+          <a:p>
+            <a:endParaRPr lang="it-IT" dirty="0"/>
+          </a:p>
+          <a:p>
+            <a:r>
+              <a:rPr lang="it-IT" dirty="0">
+                <a:solidFill>
+                  <a:srgbClr val="171FE2"/>
+                </a:solidFill>
+              </a:rPr>
+              <a:t>Ogni immagine Docker racchiude al suo interno un filesystem nativo preconfezionato</a:t>
+            </a:r>
+            <a:r>
+              <a:rPr lang="it-IT" dirty="0"/>
+              <a:t>. </a:t>
+            </a:r>
+          </a:p>
+          <a:p>
+            <a:endParaRPr lang="it-IT" dirty="0"/>
+          </a:p>
+          <a:p>
+            <a:r>
+              <a:rPr lang="it-IT" dirty="0"/>
+              <a:t>Quando il Docker Daemon avvia il processo interno del container, gli impone questo filesystem isolato come unica realtà visibile. </a:t>
+            </a:r>
+          </a:p>
+          <a:p>
+            <a:endParaRPr lang="it-IT" dirty="0"/>
           </a:p>
           <a:p>
             <a:r>
@@ -5487,12 +5925,23 @@
             </a:r>
           </a:p>
           <a:p>
-            <a:r>
-              <a:rPr lang="it-IT" dirty="0"/>
+            <a:endParaRPr lang="it-IT" dirty="0"/>
+          </a:p>
+          <a:p>
+            <a:r>
+              <a:rPr lang="it-IT" dirty="0">
+                <a:solidFill>
+                  <a:srgbClr val="171FE2"/>
+                </a:solidFill>
+              </a:rPr>
               <a:t>Un'immagine Docker è strutturata come una pila di strati sovrapposti chiamati </a:t>
             </a:r>
             <a:r>
-              <a:rPr lang="it-IT" dirty="0" err="1"/>
+              <a:rPr lang="it-IT" dirty="0" err="1">
+                <a:solidFill>
+                  <a:srgbClr val="171FE2"/>
+                </a:solidFill>
+              </a:rPr>
               <a:t>layer</a:t>
             </a:r>
             <a:r>
@@ -5501,6 +5950,9 @@
             </a:r>
           </a:p>
           <a:p>
+            <a:endParaRPr lang="it-IT" dirty="0"/>
+          </a:p>
+          <a:p>
             <a:r>
               <a:rPr lang="it-IT" dirty="0"/>
               <a:t>Ogni </a:t>
@@ -5527,17 +5979,44 @@
             </a:r>
           </a:p>
           <a:p>
+            <a:endParaRPr lang="it-IT" dirty="0"/>
+          </a:p>
+          <a:p>
             <a:r>
               <a:rPr lang="it-IT" dirty="0"/>
               <a:t>Quando scriviamo un </a:t>
             </a:r>
             <a:r>
-              <a:rPr lang="it-IT" dirty="0" err="1"/>
+              <a:rPr lang="it-IT" b="1" dirty="0" err="1"/>
               <a:t>Dockerfile</a:t>
             </a:r>
             <a:r>
               <a:rPr lang="it-IT" dirty="0"/>
-              <a:t>, ogni singola istruzione che modifica fisicamente i file (ad esempio l'aggiunta di un pacchetto con RUN </a:t>
+              <a:t>, </a:t>
+            </a:r>
+            <a:r>
+              <a:rPr lang="it-IT" dirty="0">
+                <a:solidFill>
+                  <a:srgbClr val="171FE2"/>
+                </a:solidFill>
+              </a:rPr>
+              <a:t>ogni singola istruzione che modifica fisicamente i file </a:t>
+            </a:r>
+            <a:r>
+              <a:rPr lang="it-IT" dirty="0"/>
+              <a:t>(ad esempio l'aggiunta di un pacchetto con </a:t>
+            </a:r>
+            <a:r>
+              <a:rPr lang="it-IT" b="1" dirty="0">
+                <a:solidFill>
+                  <a:srgbClr val="171FE2"/>
+                </a:solidFill>
+              </a:rPr>
+              <a:t>RUN</a:t>
+            </a:r>
+            <a:r>
+              <a:rPr lang="it-IT" dirty="0"/>
+              <a:t> </a:t>
             </a:r>
             <a:r>
               <a:rPr lang="it-IT" dirty="0" err="1"/>
@@ -5553,7 +6032,19 @@
             </a:r>
             <a:r>
               <a:rPr lang="it-IT" dirty="0"/>
-              <a:t>, o la copia del codice sorgente con COPY) genera un nuovo </a:t>
+              <a:t>, o la copia del codice sorgente con </a:t>
+            </a:r>
+            <a:r>
+              <a:rPr lang="it-IT" b="1" dirty="0">
+                <a:solidFill>
+                  <a:srgbClr val="171FE2"/>
+                </a:solidFill>
+              </a:rPr>
+              <a:t>COPY</a:t>
+            </a:r>
+            <a:r>
+              <a:rPr lang="it-IT" dirty="0"/>
+              <a:t>) genera un nuovo </a:t>
             </a:r>
             <a:r>
               <a:rPr lang="it-IT" dirty="0" err="1"/>
@@ -5580,23 +6071,43 @@
           </a:p>
           <a:p>
             <a:r>
-              <a:rPr lang="it-IT" dirty="0"/>
+              <a:rPr lang="it-IT" b="1" dirty="0">
+                <a:solidFill>
+                  <a:srgbClr val="171FE2"/>
+                </a:solidFill>
+              </a:rPr>
               <a:t>L’immagine è una pila ordinata di </a:t>
             </a:r>
             <a:r>
-              <a:rPr lang="it-IT" dirty="0" err="1"/>
+              <a:rPr lang="it-IT" b="1" dirty="0" err="1">
+                <a:solidFill>
+                  <a:srgbClr val="171FE2"/>
+                </a:solidFill>
+              </a:rPr>
               <a:t>layers</a:t>
             </a:r>
             <a:r>
-              <a:rPr lang="it-IT" dirty="0"/>
+              <a:rPr lang="it-IT" b="1" dirty="0">
+                <a:solidFill>
+                  <a:srgbClr val="171FE2"/>
+                </a:solidFill>
+              </a:rPr>
               <a:t>. L’ultimo </a:t>
             </a:r>
             <a:r>
-              <a:rPr lang="it-IT" dirty="0" err="1"/>
+              <a:rPr lang="it-IT" b="1" dirty="0" err="1">
+                <a:solidFill>
+                  <a:srgbClr val="171FE2"/>
+                </a:solidFill>
+              </a:rPr>
               <a:t>layer</a:t>
             </a:r>
             <a:r>
-              <a:rPr lang="it-IT" dirty="0"/>
+              <a:rPr lang="it-IT" b="1" dirty="0">
+                <a:solidFill>
+                  <a:srgbClr val="171FE2"/>
+                </a:solidFill>
+              </a:rPr>
               <a:t> aggiunto ci posiziona in testa.</a:t>
             </a:r>
           </a:p>
@@ -5838,6 +6349,9 @@
             </a:r>
           </a:p>
           <a:p>
+            <a:endParaRPr lang="it-IT" dirty="0"/>
+          </a:p>
+          <a:p>
             <a:r>
               <a:rPr lang="it-IT" dirty="0"/>
               <a:t>Nessun processo può alterare il contenuto di un </a:t>
@@ -5868,16 +6382,31 @@
             </a:r>
           </a:p>
           <a:p>
-            <a:r>
-              <a:rPr lang="it-IT" dirty="0"/>
+            <a:endParaRPr lang="it-IT" dirty="0"/>
+          </a:p>
+          <a:p>
+            <a:r>
+              <a:rPr lang="it-IT" dirty="0">
+                <a:solidFill>
+                  <a:srgbClr val="171FE2"/>
+                </a:solidFill>
+              </a:rPr>
               <a:t>Se i </a:t>
             </a:r>
             <a:r>
-              <a:rPr lang="it-IT" dirty="0" err="1"/>
+              <a:rPr lang="it-IT" dirty="0" err="1">
+                <a:solidFill>
+                  <a:srgbClr val="171FE2"/>
+                </a:solidFill>
+              </a:rPr>
               <a:t>layer</a:t>
             </a:r>
             <a:r>
-              <a:rPr lang="it-IT" dirty="0"/>
+              <a:rPr lang="it-IT" dirty="0">
+                <a:solidFill>
+                  <a:srgbClr val="171FE2"/>
+                </a:solidFill>
+              </a:rPr>
               <a:t> risultano immutabili, possono essere usati da tutte le immagini.</a:t>
             </a:r>
           </a:p>
@@ -6111,12 +6640,24 @@
               <a:t>La risposta risiede nel </a:t>
             </a:r>
             <a:r>
-              <a:rPr lang="it-IT" dirty="0" err="1"/>
+              <a:rPr lang="it-IT" b="1" dirty="0" err="1">
+                <a:solidFill>
+                  <a:srgbClr val="171FE2"/>
+                </a:solidFill>
+              </a:rPr>
               <a:t>Writable</a:t>
             </a:r>
             <a:r>
-              <a:rPr lang="it-IT" dirty="0"/>
-              <a:t> Layer (chiamato anche Container Layer). Nel momento esatto in cui eseguiamo il comando </a:t>
+              <a:rPr lang="it-IT" b="1" dirty="0">
+                <a:solidFill>
+                  <a:srgbClr val="171FE2"/>
+                </a:solidFill>
+              </a:rPr>
+              <a:t> Layer </a:t>
+            </a:r>
+            <a:r>
+              <a:rPr lang="it-IT" dirty="0"/>
+              <a:t>(chiamato anche Container Layer). Nel momento esatto in cui eseguiamo il comando </a:t>
             </a:r>
             <a:r>
               <a:rPr lang="it-IT" dirty="0" err="1"/>
@@ -6407,23 +6948,7 @@
             </a:r>
             <a:r>
               <a:rPr lang="it-IT" dirty="0"/>
-              <a:t> scrivibile che </a:t>
-            </a:r>
-            <a:r>
-              <a:rPr lang="it-IT" dirty="0" err="1"/>
-              <a:t>indica:"questo</a:t>
-            </a:r>
-            <a:r>
-              <a:rPr lang="it-IT" dirty="0"/>
-              <a:t> file deve essere considerato </a:t>
-            </a:r>
-            <a:r>
-              <a:rPr lang="it-IT" dirty="0" err="1"/>
-              <a:t>eliminato"Il</a:t>
-            </a:r>
-            <a:r>
-              <a:rPr lang="it-IT" dirty="0"/>
-              <a:t> file continua a esistere nei </a:t>
+              <a:t> scrivibile che indica: "questo file deve essere considerato eliminato". Il file continua a esistere nei </a:t>
             </a:r>
             <a:r>
               <a:rPr lang="it-IT" dirty="0" err="1"/>
@@ -6716,45 +7241,6 @@
             <a:r>
               <a:rPr lang="it-IT" dirty="0"/>
               <a:t>Layer 1                  [RO]</a:t>
-            </a:r>
-          </a:p>
-        </p:txBody>
-      </p:sp>
-      <p:sp>
-        <p:nvSpPr>
-          <p:cNvPr id="11" name="CasellaDiTesto 10">
-            <a:extLst>
-              <a:ext uri="{FF2B5EF4-FFF2-40B4-BE49-F238E27FC236}">
-                <a16:creationId xmlns:a16="http://schemas.microsoft.com/office/drawing/2014/main" id="{3DCCC3F0-AC49-4CEA-E6C7-E210F934ABC9}"/>
-              </a:ext>
-            </a:extLst>
-          </p:cNvPr>
-          <p:cNvSpPr txBox="1"/>
-          <p:nvPr/>
-        </p:nvSpPr>
-        <p:spPr>
-          <a:xfrm>
-            <a:off x="3048000" y="3244334"/>
-            <a:ext cx="6096000" cy="369332"/>
-          </a:xfrm>
-          <a:prstGeom prst="rect">
-            <a:avLst/>
-          </a:prstGeom>
-          <a:noFill/>
-        </p:spPr>
-        <p:txBody>
-          <a:bodyPr wrap="square">
-            <a:spAutoFit/>
-          </a:bodyPr>
-          <a:lstStyle/>
-          <a:p>
-            <a:r>
-              <a:rPr lang="it-IT" dirty="0" err="1"/>
-              <a:t>rm</a:t>
-            </a:r>
-            <a:r>
-              <a:rPr lang="it-IT" dirty="0"/>
-              <a:t> /app/config.txt</a:t>
             </a:r>
           </a:p>
         </p:txBody>
@@ -6874,17 +7360,45 @@
             </a:r>
           </a:p>
           <a:p>
-            <a:r>
-              <a:rPr lang="it-IT" dirty="0"/>
+            <a:endParaRPr lang="it-IT" dirty="0"/>
+          </a:p>
+          <a:p>
+            <a:r>
+              <a:rPr lang="it-IT" dirty="0">
+                <a:solidFill>
+                  <a:srgbClr val="171FE2"/>
+                </a:solidFill>
+              </a:rPr>
               <a:t>Se un'applicazione dentro il container tenta di leggere un file presente nell'immagine, il driver lo legge direttamente dai </a:t>
             </a:r>
             <a:r>
-              <a:rPr lang="it-IT" dirty="0" err="1"/>
+              <a:rPr lang="it-IT" dirty="0" err="1">
+                <a:solidFill>
+                  <a:srgbClr val="171FE2"/>
+                </a:solidFill>
+              </a:rPr>
               <a:t>layer</a:t>
             </a:r>
             <a:r>
-              <a:rPr lang="it-IT" dirty="0"/>
-              <a:t> di sola lettura sottostanti. Ma se l'applicazione tenta di modificare quel file, il meccanismo Copy-on-Write interviene istantaneamente: copia il file originale dai </a:t>
+              <a:rPr lang="it-IT" dirty="0">
+                <a:solidFill>
+                  <a:srgbClr val="171FE2"/>
+                </a:solidFill>
+              </a:rPr>
+              <a:t> di sola lettura sottostanti. </a:t>
+            </a:r>
+          </a:p>
+          <a:p>
+            <a:endParaRPr lang="it-IT" dirty="0">
+              <a:solidFill>
+                <a:srgbClr val="171FE2"/>
+              </a:solidFill>
+            </a:endParaRPr>
+          </a:p>
+          <a:p>
+            <a:r>
+              <a:rPr lang="it-IT" dirty="0"/>
+              <a:t>Ma se l'applicazione tenta di modificare quel file, il meccanismo Copy-on-Write interviene istantaneamente: copia il file originale dai </a:t>
             </a:r>
             <a:r>
               <a:rPr lang="it-IT" dirty="0" err="1"/>
@@ -6900,7 +7414,16 @@
             </a:r>
             <a:r>
               <a:rPr lang="it-IT" dirty="0"/>
-              <a:t> Layer del container, e applica la modifica su questa copia. Il file originale dentro l'immagine rimane inalterato, nascosto semplicemente dalla nuova versione sovrastante.</a:t>
+              <a:t> Layer del container, e applica la modifica su questa copia. </a:t>
+            </a:r>
+          </a:p>
+          <a:p>
+            <a:endParaRPr lang="it-IT" dirty="0"/>
+          </a:p>
+          <a:p>
+            <a:r>
+              <a:rPr lang="it-IT" dirty="0"/>
+              <a:t>Il file originale dentro l'immagine rimane inalterato, nascosto semplicemente dalla nuova versione sovrastante.</a:t>
             </a:r>
           </a:p>
         </p:txBody>
@@ -7041,48 +7564,102 @@
             </a:r>
             <a:r>
               <a:rPr lang="it-IT" dirty="0"/>
-              <a:t> scompattati, container attivi e volumi) risiede nella cartella di sistema /var/</a:t>
-            </a:r>
-            <a:r>
-              <a:rPr lang="it-IT" dirty="0" err="1"/>
+              <a:t> scompattati, container attivi e volumi) risiede nella cartella di sistema </a:t>
+            </a:r>
+            <a:r>
+              <a:rPr lang="it-IT" b="1" dirty="0">
+                <a:solidFill>
+                  <a:srgbClr val="FF0000"/>
+                </a:solidFill>
+              </a:rPr>
+              <a:t>/var/</a:t>
+            </a:r>
+            <a:r>
+              <a:rPr lang="it-IT" b="1" dirty="0" err="1">
+                <a:solidFill>
+                  <a:srgbClr val="FF0000"/>
+                </a:solidFill>
+              </a:rPr>
               <a:t>lib</a:t>
             </a:r>
             <a:r>
-              <a:rPr lang="it-IT" dirty="0"/>
+              <a:rPr lang="it-IT" b="1" dirty="0">
+                <a:solidFill>
+                  <a:srgbClr val="FF0000"/>
+                </a:solidFill>
+              </a:rPr>
               <a:t>/</a:t>
             </a:r>
             <a:r>
-              <a:rPr lang="it-IT" dirty="0" err="1"/>
+              <a:rPr lang="it-IT" b="1" dirty="0" err="1">
+                <a:solidFill>
+                  <a:srgbClr val="FF0000"/>
+                </a:solidFill>
+              </a:rPr>
               <a:t>docker</a:t>
             </a:r>
             <a:r>
-              <a:rPr lang="it-IT" dirty="0"/>
-              <a:t>/. </a:t>
-            </a:r>
-          </a:p>
-          <a:p>
-            <a:r>
-              <a:rPr lang="it-IT" dirty="0"/>
+              <a:rPr lang="it-IT" b="1" dirty="0">
+                <a:solidFill>
+                  <a:srgbClr val="FF0000"/>
+                </a:solidFill>
+              </a:rPr>
+              <a:t>/</a:t>
+            </a:r>
+            <a:r>
+              <a:rPr lang="it-IT" dirty="0"/>
+              <a:t>. </a:t>
+            </a:r>
+          </a:p>
+          <a:p>
+            <a:endParaRPr lang="it-IT" dirty="0"/>
+          </a:p>
+          <a:p>
+            <a:r>
+              <a:rPr lang="it-IT" b="1" dirty="0">
+                <a:solidFill>
+                  <a:srgbClr val="171FE2"/>
+                </a:solidFill>
+              </a:rPr>
               <a:t>Su sistemi operativi come Windows o </a:t>
             </a:r>
             <a:r>
-              <a:rPr lang="it-IT" dirty="0" err="1"/>
+              <a:rPr lang="it-IT" b="1" dirty="0" err="1">
+                <a:solidFill>
+                  <a:srgbClr val="171FE2"/>
+                </a:solidFill>
+              </a:rPr>
               <a:t>macOS</a:t>
             </a:r>
             <a:r>
-              <a:rPr lang="it-IT" dirty="0"/>
+              <a:rPr lang="it-IT" b="1" dirty="0">
+                <a:solidFill>
+                  <a:srgbClr val="171FE2"/>
+                </a:solidFill>
+              </a:rPr>
               <a:t>, la situazione cambia radicalmente </a:t>
             </a:r>
             <a:r>
-              <a:rPr lang="it-IT" dirty="0" err="1"/>
+              <a:rPr lang="it-IT" b="1" dirty="0" err="1">
+                <a:solidFill>
+                  <a:srgbClr val="171FE2"/>
+                </a:solidFill>
+              </a:rPr>
               <a:t>poichè</a:t>
             </a:r>
             <a:r>
-              <a:rPr lang="it-IT" dirty="0"/>
+              <a:rPr lang="it-IT" b="1" dirty="0">
+                <a:solidFill>
+                  <a:srgbClr val="171FE2"/>
+                </a:solidFill>
+              </a:rPr>
               <a:t> essi non possiedono un kernel Linux integrato. </a:t>
             </a:r>
           </a:p>
           <a:p>
+            <a:endParaRPr lang="it-IT" dirty="0"/>
+          </a:p>
+          <a:p>
             <a:r>
               <a:rPr lang="it-IT" dirty="0"/>
               <a:t>Quando installiamo Docker Desktop su Windows, il sistema deve avviare una macchina virtuale Linux minimale in background, solitamente gestita tramite l'architettura WSL2 (Windows Subsystem for Linux) o l'</a:t>
@@ -7093,22 +7670,56 @@
             </a:r>
             <a:r>
               <a:rPr lang="it-IT" dirty="0"/>
-              <a:t>-V. Di conseguenza, tutti i nostri </a:t>
-            </a:r>
-            <a:r>
-              <a:rPr lang="it-IT" dirty="0" err="1"/>
+              <a:t>-V. </a:t>
+            </a:r>
+          </a:p>
+          <a:p>
+            <a:r>
+              <a:rPr lang="it-IT" dirty="0">
+                <a:solidFill>
+                  <a:srgbClr val="171FE2"/>
+                </a:solidFill>
+              </a:rPr>
+              <a:t>Di conseguenza, tutti i nostri </a:t>
+            </a:r>
+            <a:r>
+              <a:rPr lang="it-IT" dirty="0" err="1">
+                <a:solidFill>
+                  <a:srgbClr val="171FE2"/>
+                </a:solidFill>
+              </a:rPr>
               <a:t>layer</a:t>
             </a:r>
             <a:r>
-              <a:rPr lang="it-IT" dirty="0"/>
-              <a:t> non si trovano sparsi nel filesystem di Windows, ma sono racchiusi all'interno di un unico grande file di hard disk virtuale con estensione .</a:t>
-            </a:r>
-            <a:r>
-              <a:rPr lang="it-IT" dirty="0" err="1"/>
+              <a:rPr lang="it-IT" dirty="0">
+                <a:solidFill>
+                  <a:srgbClr val="171FE2"/>
+                </a:solidFill>
+              </a:rPr>
+              <a:t> non si trovano sparsi nel filesystem di Windows, ma sono racchiusi all'interno di un unico grande file di hard disk virtuale con estensione </a:t>
+            </a:r>
+            <a:r>
+              <a:rPr lang="it-IT" b="1" dirty="0">
+                <a:solidFill>
+                  <a:srgbClr val="171FE2"/>
+                </a:solidFill>
+              </a:rPr>
+              <a:t>.</a:t>
+            </a:r>
+            <a:r>
+              <a:rPr lang="it-IT" b="1" dirty="0" err="1">
+                <a:solidFill>
+                  <a:srgbClr val="FF0000"/>
+                </a:solidFill>
+              </a:rPr>
               <a:t>vhdx</a:t>
             </a:r>
             <a:r>
-              <a:rPr lang="it-IT" dirty="0"/>
+              <a:rPr lang="it-IT" b="1" dirty="0">
+                <a:solidFill>
+                  <a:srgbClr val="171FE2"/>
+                </a:solidFill>
+              </a:rPr>
               <a:t>.</a:t>
             </a:r>
           </a:p>
@@ -7262,8 +7873,16 @@
           </a:p>
           <a:p>
             <a:r>
-              <a:rPr lang="it-IT" dirty="0"/>
-              <a:t>Il tag rappresenta un'etichetta alfanumerica, un alias logico che punta a una specifica impronta digitale (l'</a:t>
+              <a:rPr lang="it-IT" dirty="0">
+                <a:solidFill>
+                  <a:srgbClr val="171FE2"/>
+                </a:solidFill>
+              </a:rPr>
+              <a:t>Il tag rappresenta un'etichetta alfanumerica</a:t>
+            </a:r>
+            <a:r>
+              <a:rPr lang="it-IT" dirty="0"/>
+              <a:t>, un alias logico che punta a una specifica impronta digitale (l'</a:t>
             </a:r>
             <a:r>
               <a:rPr lang="it-IT" dirty="0" err="1"/>
@@ -7511,8 +8130,23 @@
             </a:r>
             <a:r>
               <a:rPr lang="it-IT" dirty="0"/>
-              <a:t> è il documento di testo che contiene le istruzioni sequenziali necessarie per automatizzare il build di un'immagine personalizzata. </a:t>
-            </a:r>
+              <a:t> è il documento di testo che </a:t>
+            </a:r>
+            <a:r>
+              <a:rPr lang="it-IT" dirty="0">
+                <a:solidFill>
+                  <a:srgbClr val="171FE2"/>
+                </a:solidFill>
+              </a:rPr>
+              <a:t>contiene le istruzioni sequenziali necessarie per automatizzare il build </a:t>
+            </a:r>
+            <a:r>
+              <a:rPr lang="it-IT" dirty="0"/>
+              <a:t>di un'immagine personalizzata. </a:t>
+            </a:r>
+          </a:p>
+          <a:p>
+            <a:endParaRPr lang="it-IT" dirty="0"/>
           </a:p>
           <a:p>
             <a:r>
@@ -7537,10 +8171,20 @@
             </a:r>
           </a:p>
           <a:p>
-            <a:r>
-              <a:rPr lang="it-IT" dirty="0"/>
+            <a:endParaRPr lang="it-IT" dirty="0"/>
+          </a:p>
+          <a:p>
+            <a:r>
+              <a:rPr lang="it-IT" b="1" dirty="0">
+                <a:solidFill>
+                  <a:srgbClr val="171FE2"/>
+                </a:solidFill>
+              </a:rPr>
               <a:t>Senza la dichiarazione FROM, il motore di Docker si troverebbe nell'impossibilità di operare, poiché non saprebbe quale filesystem di base utilizzare come radice / del progetto. </a:t>
             </a:r>
+          </a:p>
+          <a:p>
+            <a:endParaRPr lang="it-IT" dirty="0"/>
           </a:p>
           <a:p>
             <a:r>
@@ -7688,6 +8332,9 @@
             </a:r>
           </a:p>
           <a:p>
+            <a:endParaRPr lang="it-IT" dirty="0"/>
+          </a:p>
+          <a:p>
             <a:pPr marL="285750" indent="-285750">
               <a:buFont typeface="Arial" panose="020B0604020202020204" pitchFamily="34" charset="0"/>
               <a:buChar char="•"/>
@@ -7756,7 +8403,19 @@
             </a:r>
             <a:r>
               <a:rPr lang="it-IT" dirty="0"/>
-              <a:t> indica che il sistema operativo di base è Alpine Linux, una distribuzione ultrasicura e microscopica basata sulla libreria </a:t>
+              <a:t> indica che il sistema operativo di base è Alpine Linux, una </a:t>
+            </a:r>
+            <a:r>
+              <a:rPr lang="it-IT" b="1" dirty="0">
+                <a:solidFill>
+                  <a:srgbClr val="171FE2"/>
+                </a:solidFill>
+              </a:rPr>
+              <a:t>distribuzione ultrasicura e microscopica</a:t>
+            </a:r>
+            <a:r>
+              <a:rPr lang="it-IT" dirty="0"/>
+              <a:t> basata sulla libreria </a:t>
             </a:r>
             <a:r>
               <a:rPr lang="it-IT" dirty="0" err="1"/>
@@ -7774,6 +8433,9 @@
               <a:rPr lang="it-IT" dirty="0"/>
               <a:t>.</a:t>
             </a:r>
+          </a:p>
+          <a:p>
+            <a:endParaRPr lang="it-IT" dirty="0"/>
           </a:p>
           <a:p>
             <a:r>
@@ -7923,32 +8585,93 @@
             </a:r>
           </a:p>
           <a:p>
-            <a:r>
-              <a:rPr lang="it-IT" dirty="0"/>
-              <a:t>Il JDK include l'intera suite di strumenti necessari alla scrittura del codice, inclusi il compilatore </a:t>
-            </a:r>
-            <a:r>
-              <a:rPr lang="it-IT" dirty="0" err="1"/>
+            <a:endParaRPr lang="it-IT" dirty="0"/>
+          </a:p>
+          <a:p>
+            <a:r>
+              <a:rPr lang="it-IT" dirty="0"/>
+              <a:t>Il JDK include l'intera suite di strumenti necessari alla scrittura del codice, </a:t>
+            </a:r>
+            <a:r>
+              <a:rPr lang="it-IT" dirty="0">
+                <a:solidFill>
+                  <a:srgbClr val="171FE2"/>
+                </a:solidFill>
+              </a:rPr>
+              <a:t>inclusi il compilatore </a:t>
+            </a:r>
+            <a:r>
+              <a:rPr lang="it-IT" dirty="0" err="1">
+                <a:solidFill>
+                  <a:srgbClr val="171FE2"/>
+                </a:solidFill>
+              </a:rPr>
               <a:t>javac</a:t>
             </a:r>
             <a:r>
-              <a:rPr lang="it-IT" dirty="0"/>
-              <a:t>, il debugger e i tool di profilazione hardware, portando il peso dell'immagine base oltre i 400MB. </a:t>
-            </a:r>
-          </a:p>
-          <a:p>
-            <a:r>
-              <a:rPr lang="it-IT" dirty="0"/>
-              <a:t>Al contrario, l'immagine JRE contiene unicamente la Virtual Machine (java) e le librerie necessarie all'esecuzione di un file .</a:t>
-            </a:r>
-            <a:r>
-              <a:rPr lang="it-IT" dirty="0" err="1"/>
+              <a:rPr lang="it-IT" dirty="0">
+                <a:solidFill>
+                  <a:srgbClr val="171FE2"/>
+                </a:solidFill>
+              </a:rPr>
+              <a:t>, il debugger e i tool di profilazione hardware, portando il peso dell'immagine base oltre i 400MB</a:t>
+            </a:r>
+            <a:r>
+              <a:rPr lang="it-IT" dirty="0"/>
+              <a:t>. </a:t>
+            </a:r>
+          </a:p>
+          <a:p>
+            <a:endParaRPr lang="it-IT" dirty="0"/>
+          </a:p>
+          <a:p>
+            <a:r>
+              <a:rPr lang="it-IT" dirty="0"/>
+              <a:t>Al contrario, l'immagine JRE contiene unicamente la Virtual Machine (java) e le </a:t>
+            </a:r>
+            <a:r>
+              <a:rPr lang="it-IT" dirty="0">
+                <a:solidFill>
+                  <a:srgbClr val="171FE2"/>
+                </a:solidFill>
+              </a:rPr>
+              <a:t>librerie necessarie all'esecuzione di un file .</a:t>
+            </a:r>
+            <a:r>
+              <a:rPr lang="it-IT" dirty="0" err="1">
+                <a:solidFill>
+                  <a:srgbClr val="171FE2"/>
+                </a:solidFill>
+              </a:rPr>
               <a:t>jar</a:t>
             </a:r>
             <a:r>
-              <a:rPr lang="it-IT" dirty="0"/>
-              <a:t> già compilato esternamente, riducendo il peso a un terzo. </a:t>
-            </a:r>
+              <a:rPr lang="it-IT" dirty="0">
+                <a:solidFill>
+                  <a:srgbClr val="171FE2"/>
+                </a:solidFill>
+              </a:rPr>
+              <a:t> già compilato</a:t>
+            </a:r>
+            <a:r>
+              <a:rPr lang="it-IT" dirty="0"/>
+              <a:t> </a:t>
+            </a:r>
+            <a:r>
+              <a:rPr lang="it-IT" dirty="0">
+                <a:solidFill>
+                  <a:srgbClr val="171FE2"/>
+                </a:solidFill>
+              </a:rPr>
+              <a:t>esternamente</a:t>
+            </a:r>
+            <a:r>
+              <a:rPr lang="it-IT" dirty="0"/>
+              <a:t>, riducendo il peso a un terzo. </a:t>
+            </a:r>
+          </a:p>
+          <a:p>
+            <a:endParaRPr lang="it-IT" dirty="0"/>
           </a:p>
           <a:p>
             <a:r>
@@ -7972,7 +8695,7 @@
           </a:p>
           <a:p>
             <a:r>
-              <a:rPr lang="it-IT" dirty="0">
+              <a:rPr lang="it-IT" b="1" dirty="0">
                 <a:solidFill>
                   <a:srgbClr val="171FE2"/>
                 </a:solidFill>
@@ -8097,7 +8820,19 @@
           <a:p>
             <a:r>
               <a:rPr lang="it-IT" dirty="0"/>
-              <a:t>La direttiva WORKDIR /app ha il compito di impostare la directory di lavoro corrente all'interno del filesystem dell'immagine per tutte le istruzioni successive del </a:t>
+              <a:t>La direttiva WORKDIR /app ha il compito di </a:t>
+            </a:r>
+            <a:r>
+              <a:rPr lang="it-IT" dirty="0">
+                <a:solidFill>
+                  <a:srgbClr val="171FE2"/>
+                </a:solidFill>
+              </a:rPr>
+              <a:t>impostare la directory di lavoro corrente all'interno del filesystem dell'immagine</a:t>
+            </a:r>
+            <a:r>
+              <a:rPr lang="it-IT" dirty="0"/>
+              <a:t> per tutte le istruzioni successive del </a:t>
             </a:r>
             <a:r>
               <a:rPr lang="it-IT" dirty="0" err="1"/>
@@ -8111,28 +8846,35 @@
           <a:p>
             <a:r>
               <a:rPr lang="it-IT" dirty="0"/>
-              <a:t>Se la cartella specificata nel percorso assoluto non esiste, il Docker </a:t>
-            </a:r>
-            <a:r>
-              <a:rPr lang="it-IT" dirty="0" err="1"/>
-              <a:t>Daemon</a:t>
-            </a:r>
-            <a:r>
-              <a:rPr lang="it-IT" dirty="0"/>
-              <a:t> provvede a crearla automaticamente sul momento. </a:t>
-            </a:r>
-          </a:p>
-          <a:p>
-            <a:r>
-              <a:rPr lang="it-IT" dirty="0"/>
+              <a:t>Se la cartella specificata nel percorso assoluto non esiste, il Docker Daemon provvede a crearla automaticamente sul momento. </a:t>
+            </a:r>
+          </a:p>
+          <a:p>
+            <a:endParaRPr lang="it-IT" dirty="0"/>
+          </a:p>
+          <a:p>
+            <a:r>
+              <a:rPr lang="it-IT" b="1" dirty="0">
+                <a:solidFill>
+                  <a:srgbClr val="171FE2"/>
+                </a:solidFill>
+              </a:rPr>
               <a:t>È una gravissima imprecisione metodologica tentare di navigare nel filesystem inserendo istruzioni del tipo RUN </a:t>
             </a:r>
             <a:r>
-              <a:rPr lang="it-IT" dirty="0" err="1"/>
+              <a:rPr lang="it-IT" b="1" dirty="0" err="1">
+                <a:solidFill>
+                  <a:srgbClr val="171FE2"/>
+                </a:solidFill>
+              </a:rPr>
               <a:t>mkdir</a:t>
             </a:r>
             <a:r>
-              <a:rPr lang="it-IT" dirty="0"/>
+              <a:rPr lang="it-IT" b="1" dirty="0">
+                <a:solidFill>
+                  <a:srgbClr val="171FE2"/>
+                </a:solidFill>
+              </a:rPr>
               <a:t> /app &amp;&amp; cd /app. </a:t>
             </a:r>
           </a:p>
@@ -8150,12 +8892,24 @@
               <a:t> precedente, </a:t>
             </a:r>
             <a:r>
-              <a:rPr lang="it-IT" dirty="0" err="1"/>
+              <a:rPr lang="it-IT" dirty="0" err="1">
+                <a:solidFill>
+                  <a:srgbClr val="171FE2"/>
+                </a:solidFill>
+              </a:rPr>
               <a:t>percui</a:t>
             </a:r>
             <a:r>
-              <a:rPr lang="it-IT" dirty="0"/>
-              <a:t> l'effetto del comando cd andrebbe istantaneamente perduto nella riga successiva. WORKDIR agisce invece come una configurazione di stato permanente e sicura.</a:t>
+              <a:rPr lang="it-IT" dirty="0">
+                <a:solidFill>
+                  <a:srgbClr val="171FE2"/>
+                </a:solidFill>
+              </a:rPr>
+              <a:t> l'effetto del comando cd andrebbe istantaneamente perduto nella riga successiva in quanto non stabilisce una modifica del filesystem</a:t>
+            </a:r>
+            <a:r>
+              <a:rPr lang="it-IT" dirty="0"/>
+              <a:t>. WORKDIR agisce invece come una configurazione di stato permanente e sicura.</a:t>
             </a:r>
           </a:p>
           <a:p>
@@ -8507,7 +9261,19 @@
             </a:r>
             <a:r>
               <a:rPr lang="it-IT" dirty="0"/>
-              <a:t> app.jar assolve al compito fondamentale di trasferire file o intere cartelle dal filesystem locale della macchina </a:t>
+              <a:t> app.jar assolve al compito fondamentale di </a:t>
+            </a:r>
+            <a:r>
+              <a:rPr lang="it-IT" b="1" dirty="0">
+                <a:solidFill>
+                  <a:srgbClr val="171FE2"/>
+                </a:solidFill>
+              </a:rPr>
+              <a:t>trasferire file o intere cartelle dal filesystem locale</a:t>
+            </a:r>
+            <a:r>
+              <a:rPr lang="it-IT" dirty="0"/>
+              <a:t> della macchina </a:t>
             </a:r>
             <a:r>
               <a:rPr lang="it-IT" dirty="0" err="1"/>
@@ -8515,7 +9281,19 @@
             </a:r>
             <a:r>
               <a:rPr lang="it-IT" dirty="0"/>
-              <a:t> (il computer di sviluppo o il server di automazione) all'interno del filesystem virtuale dell'immagine Docker in fase di compilazione. </a:t>
+              <a:t> (il computer di sviluppo o il server di automazione) </a:t>
+            </a:r>
+            <a:r>
+              <a:rPr lang="it-IT" b="1" dirty="0">
+                <a:solidFill>
+                  <a:srgbClr val="171FE2"/>
+                </a:solidFill>
+              </a:rPr>
+              <a:t>all'interno del filesystem virtuale dell'immagine Docker</a:t>
+            </a:r>
+            <a:r>
+              <a:rPr lang="it-IT" dirty="0"/>
+              <a:t> in fase di compilazione. </a:t>
             </a:r>
           </a:p>
           <a:p>
@@ -8523,6 +9301,9 @@
               <a:rPr lang="it-IT" dirty="0"/>
               <a:t>Questa direttiva opera nel pieno rispetto delle coordinate stabilite in precedenza: </a:t>
             </a:r>
+          </a:p>
+          <a:p>
+            <a:endParaRPr lang="it-IT" dirty="0"/>
           </a:p>
           <a:p>
             <a:r>
@@ -8535,7 +9316,19 @@
             </a:r>
             <a:r>
               <a:rPr lang="it-IT" dirty="0"/>
-              <a:t>rappresenta il percorso sorgente sul PC ospitante, il quale deve trovarsi tassativamente all'interno del cosiddetto Build </a:t>
+              <a:t>rappresenta il </a:t>
+            </a:r>
+            <a:r>
+              <a:rPr lang="it-IT" dirty="0">
+                <a:solidFill>
+                  <a:srgbClr val="171FE2"/>
+                </a:solidFill>
+              </a:rPr>
+              <a:t>percorso sorgente sul PC ospitante</a:t>
+            </a:r>
+            <a:r>
+              <a:rPr lang="it-IT" dirty="0"/>
+              <a:t>, il quale deve trovarsi tassativamente all'interno del cosiddetto Build </a:t>
             </a:r>
             <a:r>
               <a:rPr lang="it-IT" dirty="0" err="1"/>
@@ -8545,6 +9338,9 @@
               <a:rPr lang="it-IT" dirty="0"/>
               <a:t> (la cartella in cui è stato lanciato il comando di build); </a:t>
             </a:r>
+          </a:p>
+          <a:p>
+            <a:endParaRPr lang="it-IT" dirty="0"/>
           </a:p>
           <a:p>
             <a:r>
@@ -8557,7 +9353,19 @@
             </a:r>
             <a:r>
               <a:rPr lang="it-IT" dirty="0"/>
-              <a:t>definisce il percorso di destinazione interno. Se prima è stato dichiarato WORKDIR /app, il file descritto nell'esempio verrà memorizzato nel percorso assoluto /app/app.jar.</a:t>
+              <a:t>definisce il </a:t>
+            </a:r>
+            <a:r>
+              <a:rPr lang="it-IT" dirty="0">
+                <a:solidFill>
+                  <a:srgbClr val="171FE2"/>
+                </a:solidFill>
+              </a:rPr>
+              <a:t>percorso di destinazione interno</a:t>
+            </a:r>
+            <a:r>
+              <a:rPr lang="it-IT" dirty="0"/>
+              <a:t>. Se prima è stato dichiarato WORKDIR /app, il file descritto nell'esempio verrà memorizzato nel percorso assoluto /app/app.jar.</a:t>
             </a:r>
           </a:p>
         </p:txBody>
@@ -8693,7 +9501,19 @@
             </a:r>
             <a:r>
               <a:rPr lang="it-IT" dirty="0"/>
-              <a:t>", "app.jar"] definisce il comando predefinito che il container dovrà eseguire nel momento esatto in cui verrà risvegliato tramite il comando </a:t>
+              <a:t>", "app.jar"] definisce il comando predefinito che il container dovrà eseguire </a:t>
+            </a:r>
+            <a:r>
+              <a:rPr lang="it-IT" dirty="0">
+                <a:solidFill>
+                  <a:srgbClr val="171FE2"/>
+                </a:solidFill>
+              </a:rPr>
+              <a:t>nel momento esatto in cui verrà risvegliato </a:t>
+            </a:r>
+            <a:r>
+              <a:rPr lang="it-IT" dirty="0"/>
+              <a:t>tramite il comando </a:t>
             </a:r>
             <a:r>
               <a:rPr lang="it-IT" dirty="0" err="1"/>
@@ -8713,12 +9533,26 @@
             </a:r>
           </a:p>
           <a:p>
-            <a:r>
-              <a:rPr lang="it-IT" dirty="0"/>
+            <a:endParaRPr lang="it-IT" dirty="0"/>
+          </a:p>
+          <a:p>
+            <a:r>
+              <a:rPr lang="it-IT" dirty="0">
+                <a:solidFill>
+                  <a:srgbClr val="171FE2"/>
+                </a:solidFill>
+              </a:rPr>
               <a:t>Questa istruzione non effettua alcuna elaborazione attiva o computazione durante la fase di build dell'immagine. </a:t>
             </a:r>
           </a:p>
           <a:p>
+            <a:endParaRPr lang="it-IT" dirty="0">
+              <a:solidFill>
+                <a:srgbClr val="171FE2"/>
+              </a:solidFill>
+            </a:endParaRPr>
+          </a:p>
+          <a:p>
             <a:r>
               <a:rPr lang="it-IT" dirty="0"/>
               <a:t>CMD si limita a scrivere un metadato di testo all'interno della configurazione dell'immagine. </a:t>
@@ -8740,8 +9574,16 @@
           </a:p>
           <a:p>
             <a:r>
-              <a:rPr lang="it-IT" dirty="0"/>
-              <a:t>Questa notazione assicura che il processo applicativo venga lanciato direttamente sul kernel con il PID 1, permettendogli di intercettare correttamente i segnali di terminazione di sistema (come SIGTERM o SIGKILL) inviati da Docker durante le fasi di arresto.</a:t>
+              <a:rPr lang="it-IT" dirty="0">
+                <a:solidFill>
+                  <a:srgbClr val="171FE2"/>
+                </a:solidFill>
+              </a:rPr>
+              <a:t>Questa notazione assicura che il processo applicativo venga lanciato direttamente sul kernel con il PID 1</a:t>
+            </a:r>
+            <a:r>
+              <a:rPr lang="it-IT" dirty="0"/>
+              <a:t>, permettendogli di intercettare correttamente i segnali di terminazione di sistema (come SIGTERM o SIGKILL) inviati da Docker durante le fasi di arresto.</a:t>
             </a:r>
           </a:p>
           <a:p>
@@ -8891,24 +9733,49 @@
             </a:r>
           </a:p>
           <a:p>
+            <a:endParaRPr lang="it-IT" dirty="0"/>
+          </a:p>
+          <a:p>
             <a:r>
               <a:rPr lang="it-IT" dirty="0"/>
               <a:t>L'istruzione EXPOSE è una direttiva di puro metadato con un valore esclusivamente documentale e informativo. </a:t>
             </a:r>
           </a:p>
           <a:p>
-            <a:r>
-              <a:rPr lang="it-IT" dirty="0"/>
+            <a:endParaRPr lang="it-IT" dirty="0"/>
+          </a:p>
+          <a:p>
+            <a:r>
+              <a:rPr lang="it-IT" dirty="0">
+                <a:solidFill>
+                  <a:srgbClr val="171FE2"/>
+                </a:solidFill>
+              </a:rPr>
               <a:t>Serve unicamente a comunicare ai sistemisti o agli utilizzatori dell'immagine quale porta interna l'applicazione intende utilizzare a </a:t>
             </a:r>
             <a:r>
-              <a:rPr lang="it-IT" dirty="0" err="1"/>
+              <a:rPr lang="it-IT" dirty="0" err="1">
+                <a:solidFill>
+                  <a:srgbClr val="171FE2"/>
+                </a:solidFill>
+              </a:rPr>
               <a:t>runtime</a:t>
             </a:r>
             <a:r>
-              <a:rPr lang="it-IT" dirty="0"/>
+              <a:rPr lang="it-IT" dirty="0">
+                <a:solidFill>
+                  <a:srgbClr val="171FE2"/>
+                </a:solidFill>
+              </a:rPr>
               <a:t> per ascoltare il traffico. </a:t>
             </a:r>
+          </a:p>
+          <a:p>
+            <a:endParaRPr lang="it-IT" dirty="0">
+              <a:solidFill>
+                <a:srgbClr val="171FE2"/>
+              </a:solidFill>
+            </a:endParaRPr>
           </a:p>
           <a:p>
             <a:r>
@@ -9056,6 +9923,9 @@
             </a:r>
           </a:p>
           <a:p>
+            <a:endParaRPr lang="it-IT" dirty="0"/>
+          </a:p>
+          <a:p>
             <a:r>
               <a:rPr lang="it-IT" dirty="0"/>
               <a:t>L'istruzione CMD descrive un comando o un set di argomenti predefiniti che l'utente può facilmente e totalmente sovrascrivere dal terminale in fase di esecuzione (es. digitando </a:t>
@@ -9086,12 +9956,18 @@
             </a:r>
           </a:p>
           <a:p>
+            <a:endParaRPr lang="it-IT" dirty="0"/>
+          </a:p>
+          <a:p>
             <a:r>
               <a:rPr lang="it-IT" dirty="0"/>
               <a:t>Al contrario, la direttiva ENTRYPOINT definisce il comando principale, immutabile e strutturale del container, trasformando il container stesso in un vero e proprio file eseguibile specializzato. </a:t>
             </a:r>
           </a:p>
           <a:p>
+            <a:endParaRPr lang="it-IT" dirty="0"/>
+          </a:p>
+          <a:p>
             <a:r>
               <a:rPr lang="it-IT" dirty="0">
                 <a:solidFill>
@@ -9148,6 +10024,13 @@
               </a:rPr>
               <a:t> (es. google.com) non sostituirà l'istruzione, ma verrà concatenato in coda ad essa.</a:t>
             </a:r>
+          </a:p>
+          <a:p>
+            <a:endParaRPr lang="it-IT" dirty="0">
+              <a:solidFill>
+                <a:srgbClr val="171FE2"/>
+              </a:solidFill>
+            </a:endParaRPr>
           </a:p>
           <a:p>
             <a:r>
@@ -9284,9 +10167,20 @@
             </a:r>
           </a:p>
           <a:p>
-            <a:r>
-              <a:rPr lang="it-IT" dirty="0"/>
-              <a:t>Tutte le modifiche operative prodotte dall'applicazione in esecuzione (come il salvataggio di record in un database </a:t>
+            <a:endParaRPr lang="it-IT" dirty="0"/>
+          </a:p>
+          <a:p>
+            <a:r>
+              <a:rPr lang="it-IT" dirty="0">
+                <a:solidFill>
+                  <a:srgbClr val="171FE2"/>
+                </a:solidFill>
+              </a:rPr>
+              <a:t>Tutte le modifiche operative prodotte dall'applicazione in esecuzione </a:t>
+            </a:r>
+            <a:r>
+              <a:rPr lang="it-IT" dirty="0"/>
+              <a:t>(come il salvataggio di record in un database </a:t>
             </a:r>
             <a:r>
               <a:rPr lang="it-IT" dirty="0" err="1"/>
@@ -9294,16 +10188,39 @@
             </a:r>
             <a:r>
               <a:rPr lang="it-IT" dirty="0"/>
-              <a:t>, la scrittura di file di log o il caricamento di immagini del profilo da parte degli utenti) vengono depositate esclusivamente all'interno del </a:t>
-            </a:r>
-            <a:r>
-              <a:rPr lang="it-IT" dirty="0" err="1"/>
+              <a:t>, la scrittura di file di log o il caricamento di immagini del profilo da parte degli utenti) </a:t>
+            </a:r>
+            <a:r>
+              <a:rPr lang="it-IT" dirty="0">
+                <a:solidFill>
+                  <a:srgbClr val="171FE2"/>
+                </a:solidFill>
+              </a:rPr>
+              <a:t>vengono depositate esclusivamente all'interno del </a:t>
+            </a:r>
+            <a:r>
+              <a:rPr lang="it-IT" dirty="0" err="1">
+                <a:solidFill>
+                  <a:srgbClr val="171FE2"/>
+                </a:solidFill>
+              </a:rPr>
               <a:t>Writable</a:t>
             </a:r>
             <a:r>
-              <a:rPr lang="it-IT" dirty="0"/>
-              <a:t> Layer (il Container Layer). </a:t>
-            </a:r>
+              <a:rPr lang="it-IT" dirty="0">
+                <a:solidFill>
+                  <a:srgbClr val="171FE2"/>
+                </a:solidFill>
+              </a:rPr>
+              <a:t> Layer </a:t>
+            </a:r>
+            <a:r>
+              <a:rPr lang="it-IT" dirty="0"/>
+              <a:t>(il Container Layer). </a:t>
+            </a:r>
+          </a:p>
+          <a:p>
+            <a:endParaRPr lang="it-IT" dirty="0"/>
           </a:p>
           <a:p>
             <a:r>
@@ -9324,29 +10241,40 @@
             </a:r>
             <a:r>
               <a:rPr lang="it-IT" dirty="0"/>
-              <a:t>, il suo livello scrivibile viene distrutto dal </a:t>
-            </a:r>
-            <a:r>
-              <a:rPr lang="it-IT" dirty="0" err="1"/>
-              <a:t>Daemon</a:t>
-            </a:r>
-            <a:r>
-              <a:rPr lang="it-IT" dirty="0"/>
-              <a:t>, causando la perdita totale, definitiva e irrecuperabile di tutti i dati dinamici accumulati.</a:t>
-            </a:r>
-          </a:p>
-          <a:p>
-            <a:r>
-              <a:rPr lang="it-IT" dirty="0"/>
+              <a:t>, il suo livello scrivibile viene distrutto dal Daemon, causando la perdita totale, definitiva e irrecuperabile di tutti i dati dinamici accumulati.</a:t>
+            </a:r>
+          </a:p>
+          <a:p>
+            <a:endParaRPr lang="it-IT" dirty="0"/>
+          </a:p>
+          <a:p>
+            <a:r>
+              <a:rPr lang="it-IT" b="1" dirty="0">
+                <a:solidFill>
+                  <a:srgbClr val="171FE2"/>
+                </a:solidFill>
+              </a:rPr>
               <a:t>I container sono progettati per essere entità volatili e intercambiabili (</a:t>
             </a:r>
             <a:r>
-              <a:rPr lang="it-IT" dirty="0" err="1"/>
+              <a:rPr lang="it-IT" b="1" dirty="0" err="1">
+                <a:solidFill>
+                  <a:srgbClr val="171FE2"/>
+                </a:solidFill>
+              </a:rPr>
               <a:t>stateless</a:t>
             </a:r>
             <a:r>
-              <a:rPr lang="it-IT" dirty="0"/>
-              <a:t>). Lo stato e i dati preziosi dell'azienda devono tassativamente risiedere altrove.</a:t>
+              <a:rPr lang="it-IT" b="1" dirty="0">
+                <a:solidFill>
+                  <a:srgbClr val="171FE2"/>
+                </a:solidFill>
+              </a:rPr>
+              <a:t>)</a:t>
+            </a:r>
+            <a:r>
+              <a:rPr lang="it-IT" dirty="0"/>
+              <a:t>. Lo stato e i dati preziosi dell'azienda devono tassativamente risiedere altrove.</a:t>
             </a:r>
           </a:p>
         </p:txBody>
@@ -9471,8 +10399,16 @@
           </a:p>
           <a:p>
             <a:r>
-              <a:rPr lang="it-IT" dirty="0"/>
-              <a:t>Un volume è un'area di memorizzazione, una cartella fisica creata e gestita direttamente dal Docker </a:t>
+              <a:rPr lang="it-IT" b="1" dirty="0">
+                <a:solidFill>
+                  <a:srgbClr val="171FE2"/>
+                </a:solidFill>
+              </a:rPr>
+              <a:t>Un volume è un'area di memorizzazione</a:t>
+            </a:r>
+            <a:r>
+              <a:rPr lang="it-IT" dirty="0"/>
+              <a:t>, una cartella fisica creata e gestita direttamente dal Docker </a:t>
             </a:r>
             <a:r>
               <a:rPr lang="it-IT" dirty="0" err="1"/>
@@ -9536,10 +10472,22 @@
             </a:r>
             <a:r>
               <a:rPr lang="it-IT" dirty="0"/>
-              <a:t> Layer temporaneo, venendo registrata direttamente sul disco </a:t>
-            </a:r>
-            <a:r>
-              <a:rPr lang="it-IT" dirty="0" err="1"/>
+              <a:t> Layer temporaneo, </a:t>
+            </a:r>
+            <a:r>
+              <a:rPr lang="it-IT" dirty="0">
+                <a:solidFill>
+                  <a:srgbClr val="171FE2"/>
+                </a:solidFill>
+              </a:rPr>
+              <a:t>venendo registrata direttamente sul disco </a:t>
+            </a:r>
+            <a:r>
+              <a:rPr lang="it-IT" dirty="0" err="1">
+                <a:solidFill>
+                  <a:srgbClr val="171FE2"/>
+                </a:solidFill>
+              </a:rPr>
               <a:t>dell'host</a:t>
             </a:r>
             <a:r>
@@ -9716,6 +10664,9 @@
             </a:r>
           </a:p>
           <a:p>
+            <a:endParaRPr lang="it-IT" dirty="0"/>
+          </a:p>
+          <a:p>
             <a:r>
               <a:rPr lang="it-IT" b="1" dirty="0"/>
               <a:t>VOLUMES</a:t>
@@ -10124,6 +11075,9 @@
             </a:r>
           </a:p>
           <a:p>
+            <a:endParaRPr lang="it-IT" dirty="0"/>
+          </a:p>
+          <a:p>
             <a:r>
               <a:rPr lang="it-IT" dirty="0"/>
               <a:t>Prima di avviare l'elaborazione di un </a:t>
@@ -10138,24 +11092,53 @@
             </a:r>
           </a:p>
           <a:p>
-            <a:r>
-              <a:rPr lang="it-IT" dirty="0"/>
+            <a:endParaRPr lang="it-IT" dirty="0"/>
+          </a:p>
+          <a:p>
+            <a:r>
+              <a:rPr lang="it-IT" dirty="0">
+                <a:solidFill>
+                  <a:srgbClr val="171FE2"/>
+                </a:solidFill>
+              </a:rPr>
               <a:t>Se l'istruzione è testualmente identica e (nel caso di COPY) i file sorgenti sul PC non hanno subito alcuna modifica nei loro byte, Docker salta completamente l'esecuzione del comando. </a:t>
             </a:r>
           </a:p>
           <a:p>
-            <a:r>
-              <a:rPr lang="it-IT" dirty="0"/>
+            <a:endParaRPr lang="it-IT" dirty="0"/>
+          </a:p>
+          <a:p>
+            <a:r>
+              <a:rPr lang="it-IT" b="1" dirty="0">
+                <a:solidFill>
+                  <a:srgbClr val="171FE2"/>
+                </a:solidFill>
+              </a:rPr>
               <a:t>Riutilizza istantaneamente il </a:t>
             </a:r>
             <a:r>
-              <a:rPr lang="it-IT" dirty="0" err="1"/>
+              <a:rPr lang="it-IT" b="1" dirty="0" err="1">
+                <a:solidFill>
+                  <a:srgbClr val="171FE2"/>
+                </a:solidFill>
+              </a:rPr>
               <a:t>layer</a:t>
             </a:r>
             <a:r>
-              <a:rPr lang="it-IT" dirty="0"/>
-              <a:t> preesistente, stampando a schermo la dicitura CACHED. Questo riduce i tempi di build successivi da minuti a frazioni di secondo.</a:t>
-            </a:r>
+              <a:rPr lang="it-IT" b="1" dirty="0">
+                <a:solidFill>
+                  <a:srgbClr val="171FE2"/>
+                </a:solidFill>
+              </a:rPr>
+              <a:t> preesistente</a:t>
+            </a:r>
+            <a:r>
+              <a:rPr lang="it-IT" dirty="0"/>
+              <a:t>, stampando a schermo la dicitura CACHED. Questo riduce i tempi di build successivi da minuti a frazioni di secondo.</a:t>
+            </a:r>
+          </a:p>
+          <a:p>
+            <a:endParaRPr lang="it-IT" dirty="0"/>
           </a:p>
           <a:p>
             <a:r>
@@ -10283,22 +11266,34 @@
           <a:lstStyle/>
           <a:p>
             <a:r>
+              <a:rPr lang="it-IT" dirty="0"/>
+              <a:t>Il meccanismo di caching di Docker obbedisce a una regola algoritmica ferrea: è di tipo lineare, sequenziale e a cascata. </a:t>
+            </a:r>
+          </a:p>
+          <a:p>
+            <a:r>
               <a:rPr lang="it-IT" dirty="0">
                 <a:solidFill>
                   <a:srgbClr val="171FE2"/>
                 </a:solidFill>
               </a:rPr>
-              <a:t>Il meccanismo di caching di Docker obbedisce a una regola algoritmica ferrea: è di tipo lineare, sequenziale e a cascata. </a:t>
-            </a:r>
-          </a:p>
-          <a:p>
+              <a:t>Nel momento esatto in cui una singola istruzione del </a:t>
+            </a:r>
+            <a:r>
+              <a:rPr lang="it-IT" dirty="0" err="1">
+                <a:solidFill>
+                  <a:srgbClr val="171FE2"/>
+                </a:solidFill>
+              </a:rPr>
+              <a:t>Dockerfile</a:t>
+            </a:r>
             <a:r>
               <a:rPr lang="it-IT" dirty="0">
                 <a:solidFill>
                   <a:srgbClr val="171FE2"/>
                 </a:solidFill>
               </a:rPr>
-              <a:t>Nel momento esatto in cui una singola istruzione del </a:t>
+              <a:t> subisce una variazione (o perché cambia il testo del comando o perché viene modificato un file sorgente agganciato da una COPY), l'impronta digitale di quel </a:t>
             </a:r>
             <a:r>
               <a:rPr lang="it-IT" dirty="0" err="1">
@@ -10306,6 +11301,38 @@
                   <a:srgbClr val="171FE2"/>
                 </a:solidFill>
               </a:rPr>
+              <a:t>layer</a:t>
+            </a:r>
+            <a:r>
+              <a:rPr lang="it-IT" dirty="0">
+                <a:solidFill>
+                  <a:srgbClr val="171FE2"/>
+                </a:solidFill>
+              </a:rPr>
+              <a:t> viene invalidata. Di conseguenza, Docker cancella e invalida la cache per quel livello e per tutti i </a:t>
+            </a:r>
+            <a:r>
+              <a:rPr lang="it-IT" dirty="0" err="1">
+                <a:solidFill>
+                  <a:srgbClr val="171FE2"/>
+                </a:solidFill>
+              </a:rPr>
+              <a:t>layer</a:t>
+            </a:r>
+            <a:r>
+              <a:rPr lang="it-IT" dirty="0">
+                <a:solidFill>
+                  <a:srgbClr val="171FE2"/>
+                </a:solidFill>
+              </a:rPr>
+              <a:t> successivi del </a:t>
+            </a:r>
+            <a:r>
+              <a:rPr lang="it-IT" dirty="0" err="1">
+                <a:solidFill>
+                  <a:srgbClr val="171FE2"/>
+                </a:solidFill>
+              </a:rPr>
               <a:t>Dockerfile</a:t>
             </a:r>
             <a:r>
@@ -10314,7 +11341,17 @@
                   <a:srgbClr val="171FE2"/>
                 </a:solidFill>
               </a:rPr>
-              <a:t> subisce una variazione (o perché cambia il testo del comando o perché viene modificato un file sorgente agganciato da una COPY), l'impronta digitale di quel </a:t>
+              <a:t>, costringendo il motore a rieseguire da zero tutti i comandi rimanenti. </a:t>
+            </a:r>
+          </a:p>
+          <a:p>
+            <a:r>
+              <a:rPr lang="it-IT" dirty="0">
+                <a:solidFill>
+                  <a:srgbClr val="171FE2"/>
+                </a:solidFill>
+              </a:rPr>
+              <a:t>Da ciò deriva la regola d'oro della scrittura dei </a:t>
             </a:r>
             <a:r>
               <a:rPr lang="it-IT" dirty="0" err="1">
@@ -10322,7 +11359,7 @@
                   <a:srgbClr val="171FE2"/>
                 </a:solidFill>
               </a:rPr>
-              <a:t>layer</a:t>
+              <a:t>Dockerfile</a:t>
             </a:r>
             <a:r>
               <a:rPr lang="it-IT" dirty="0">
@@ -10330,64 +11367,6 @@
                   <a:srgbClr val="171FE2"/>
                 </a:solidFill>
               </a:rPr>
-              <a:t> viene invalidata. Di conseguenza, Docker cancella e invalida la cache per quel livello e per tutti i </a:t>
-            </a:r>
-            <a:r>
-              <a:rPr lang="it-IT" dirty="0" err="1">
-                <a:solidFill>
-                  <a:srgbClr val="171FE2"/>
-                </a:solidFill>
-              </a:rPr>
-              <a:t>layer</a:t>
-            </a:r>
-            <a:r>
-              <a:rPr lang="it-IT" dirty="0">
-                <a:solidFill>
-                  <a:srgbClr val="171FE2"/>
-                </a:solidFill>
-              </a:rPr>
-              <a:t> successivi del </a:t>
-            </a:r>
-            <a:r>
-              <a:rPr lang="it-IT" dirty="0" err="1">
-                <a:solidFill>
-                  <a:srgbClr val="171FE2"/>
-                </a:solidFill>
-              </a:rPr>
-              <a:t>Dockerfile</a:t>
-            </a:r>
-            <a:r>
-              <a:rPr lang="it-IT" dirty="0">
-                <a:solidFill>
-                  <a:srgbClr val="171FE2"/>
-                </a:solidFill>
-              </a:rPr>
-              <a:t>, costringendo il motore a rieseguire da zero tutti i comandi rimanenti. </a:t>
-            </a:r>
-          </a:p>
-          <a:p>
-            <a:r>
-              <a:rPr lang="it-IT" dirty="0">
-                <a:solidFill>
-                  <a:srgbClr val="171FE2"/>
-                </a:solidFill>
-              </a:rPr>
-              <a:t>Da ciò deriva la regola d'oro della scrittura dei </a:t>
-            </a:r>
-            <a:r>
-              <a:rPr lang="it-IT" dirty="0" err="1">
-                <a:solidFill>
-                  <a:srgbClr val="171FE2"/>
-                </a:solidFill>
-              </a:rPr>
-              <a:t>Dockerfile</a:t>
-            </a:r>
-            <a:r>
-              <a:rPr lang="it-IT" dirty="0">
-                <a:solidFill>
-                  <a:srgbClr val="171FE2"/>
-                </a:solidFill>
-              </a:rPr>
               <a:t>: le istruzioni stabili che cambiano raramente (come l'installazione dei pacchetti) vanno posizionate in alto, mentre i file che variano costantemente (il codice sorgente) vanno scritti alla fine.</a:t>
             </a:r>
           </a:p>
@@ -10420,11 +11399,71 @@
               <a:rPr lang="it-IT" dirty="0"/>
               <a:t>", e solo alla fine "COPY . .". Se cambia una riga di codice JS, non dobbiamo riscaricare i pacchetti da internet.</a:t>
             </a:r>
+          </a:p>
+          <a:p>
             <a:endParaRPr lang="it-IT" dirty="0">
               <a:solidFill>
                 <a:srgbClr val="171FE2"/>
               </a:solidFill>
             </a:endParaRPr>
+          </a:p>
+          <a:p>
+            <a:r>
+              <a:rPr lang="it-IT" b="1" dirty="0">
+                <a:solidFill>
+                  <a:srgbClr val="171FE2"/>
+                </a:solidFill>
+              </a:rPr>
+              <a:t>I </a:t>
+            </a:r>
+            <a:r>
+              <a:rPr lang="it-IT" b="1" dirty="0" err="1">
+                <a:solidFill>
+                  <a:srgbClr val="171FE2"/>
+                </a:solidFill>
+              </a:rPr>
+              <a:t>layer</a:t>
+            </a:r>
+            <a:r>
+              <a:rPr lang="it-IT" b="1" dirty="0">
+                <a:solidFill>
+                  <a:srgbClr val="171FE2"/>
+                </a:solidFill>
+              </a:rPr>
+              <a:t> Docker sono immutabili: quando cambia un'istruzione, il </a:t>
+            </a:r>
+            <a:r>
+              <a:rPr lang="it-IT" b="1" dirty="0" err="1">
+                <a:solidFill>
+                  <a:srgbClr val="171FE2"/>
+                </a:solidFill>
+              </a:rPr>
+              <a:t>layer</a:t>
+            </a:r>
+            <a:r>
+              <a:rPr lang="it-IT" b="1" dirty="0">
+                <a:solidFill>
+                  <a:srgbClr val="171FE2"/>
+                </a:solidFill>
+              </a:rPr>
+              <a:t> interessato non viene modificato ma invalidato e ricostruito, insieme a tutti i </a:t>
+            </a:r>
+            <a:r>
+              <a:rPr lang="it-IT" b="1" dirty="0" err="1">
+                <a:solidFill>
+                  <a:srgbClr val="171FE2"/>
+                </a:solidFill>
+              </a:rPr>
+              <a:t>layer</a:t>
+            </a:r>
+            <a:r>
+              <a:rPr lang="it-IT" b="1" dirty="0">
+                <a:solidFill>
+                  <a:srgbClr val="171FE2"/>
+                </a:solidFill>
+              </a:rPr>
+              <a:t> che dipendono da esso.</a:t>
+            </a:r>
           </a:p>
         </p:txBody>
       </p:sp>
@@ -12265,15 +13304,19 @@
           <a:p>
             <a:r>
               <a:rPr lang="it-IT" dirty="0"/>
-              <a:t>Le comunicazioni tra la CLI e il </a:t>
-            </a:r>
-            <a:r>
-              <a:rPr lang="it-IT" dirty="0" err="1"/>
-              <a:t>Daemon</a:t>
-            </a:r>
-            <a:r>
-              <a:rPr lang="it-IT" dirty="0"/>
-              <a:t> sfruttano la Docker Engine API, un'interfaccia di programmazione guidata dalle specifiche HTTP e conforme all'architettura REST (</a:t>
+              <a:t>Le comunicazioni tra la CLI e il Daemon sfruttano la Docker Engine API, </a:t>
+            </a:r>
+            <a:r>
+              <a:rPr lang="it-IT" dirty="0">
+                <a:solidFill>
+                  <a:srgbClr val="171FE2"/>
+                </a:solidFill>
+              </a:rPr>
+              <a:t>un'interfaccia di programmazione guidata dalle specifiche HTTP </a:t>
+            </a:r>
+            <a:r>
+              <a:rPr lang="it-IT" dirty="0"/>
+              <a:t>e conforme all'architettura REST (</a:t>
             </a:r>
             <a:r>
               <a:rPr lang="it-IT" dirty="0" err="1"/>
@@ -12285,6 +13328,9 @@
             </a:r>
           </a:p>
           <a:p>
+            <a:endParaRPr lang="it-IT" dirty="0"/>
+          </a:p>
+          <a:p>
             <a:r>
               <a:rPr lang="it-IT" dirty="0"/>
               <a:t>Quando un utente digita sul terminale il comando di ispezione </a:t>
@@ -12342,18 +13388,16 @@
             </a:r>
           </a:p>
           <a:p>
-            <a:r>
-              <a:rPr lang="it-IT" dirty="0"/>
-              <a:t>Il </a:t>
-            </a:r>
-            <a:r>
-              <a:rPr lang="it-IT" dirty="0" err="1"/>
-              <a:t>Daemon</a:t>
-            </a:r>
-            <a:r>
-              <a:rPr lang="it-IT" dirty="0"/>
-              <a:t> intercetta la richiesta HTTP, interroga la propria memoria interna sullo stato dei processi attivi, e confeziona una risposta contenente un payload in formato JSON strutturato. </a:t>
-            </a:r>
+            <a:endParaRPr lang="it-IT" dirty="0"/>
+          </a:p>
+          <a:p>
+            <a:r>
+              <a:rPr lang="it-IT" dirty="0"/>
+              <a:t>Il Daemon intercetta la richiesta HTTP, interroga la propria memoria interna sullo stato dei processi attivi, e confeziona una risposta contenente un payload in formato JSON strutturato. </a:t>
+            </a:r>
+          </a:p>
+          <a:p>
+            <a:endParaRPr lang="it-IT" dirty="0"/>
           </a:p>
           <a:p>
             <a:r>
@@ -12488,15 +13532,7 @@
           <a:p>
             <a:r>
               <a:rPr lang="it-IT" dirty="0"/>
-              <a:t>Nello scenario standard in cui la Docker CLI e il Docker </a:t>
-            </a:r>
-            <a:r>
-              <a:rPr lang="it-IT" dirty="0" err="1"/>
-              <a:t>Daemon</a:t>
-            </a:r>
-            <a:r>
-              <a:rPr lang="it-IT" dirty="0"/>
-              <a:t> risiedono sulla stessa identica macchina fisica o virtuale Linux, la comunicazione HTTP non attraversa la scheda di rete fisica, ma sfrutta un canale di trasporto interno ultra-veloce chiamato Unix Domain </a:t>
+              <a:t>Nello scenario standard in cui la Docker CLI e il Docker Daemon risiedono sulla stessa identica macchina fisica o virtuale Linux, la comunicazione HTTP non attraversa la scheda di rete fisica, ma sfrutta un canale di trasporto interno ultra-veloce chiamato Unix Domain </a:t>
             </a:r>
             <a:r>
               <a:rPr lang="it-IT" dirty="0" err="1"/>
@@ -12508,6 +13544,9 @@
             </a:r>
           </a:p>
           <a:p>
+            <a:endParaRPr lang="it-IT" dirty="0"/>
+          </a:p>
+          <a:p>
             <a:r>
               <a:rPr lang="it-IT" dirty="0"/>
               <a:t>Questo </a:t>
@@ -12538,6 +13577,9 @@
             </a:r>
           </a:p>
           <a:p>
+            <a:endParaRPr lang="it-IT" dirty="0"/>
+          </a:p>
+          <a:p>
             <a:r>
               <a:rPr lang="it-IT" dirty="0"/>
               <a:t>Le chiamate HTTP REST </a:t>
@@ -12562,6 +13604,9 @@
               <a:rPr lang="it-IT" dirty="0"/>
               <a:t> di rete TCP/IP, il che azzera la latenza e garantisce prestazioni elevatissime.</a:t>
             </a:r>
+          </a:p>
+          <a:p>
+            <a:endParaRPr lang="it-IT" dirty="0"/>
           </a:p>
           <a:p>
             <a:r>
@@ -12723,7 +13768,11 @@
           </a:p>
           <a:p>
             <a:r>
-              <a:rPr lang="it-IT" dirty="0"/>
+              <a:rPr lang="it-IT" dirty="0">
+                <a:solidFill>
+                  <a:srgbClr val="171FE2"/>
+                </a:solidFill>
+              </a:rPr>
               <a:t>Al suo interno non vi è alcuna esecuzione attiva. </a:t>
             </a:r>
           </a:p>
@@ -12817,7 +13866,11 @@
           </a:p>
           <a:p>
             <a:r>
-              <a:rPr lang="it-IT" dirty="0"/>
+              <a:rPr lang="it-IT" b="1" dirty="0">
+                <a:solidFill>
+                  <a:srgbClr val="171FE2"/>
+                </a:solidFill>
+              </a:rPr>
               <a:t>Per applicare una modifica al codice, è necessario generare una nuova versione dell'immagine.</a:t>
             </a:r>
           </a:p>
@@ -13756,6 +14809,18 @@
 </file>
 
 <file path=customXml/item1.xml><?xml version="1.0" encoding="utf-8"?>
+<p:properties xmlns:p="http://schemas.microsoft.com/office/2006/metadata/properties" xmlns:xsi="http://www.w3.org/2001/XMLSchema-instance" xmlns:pc="http://schemas.microsoft.com/office/infopath/2007/PartnerControls">
+  <documentManagement>
+    <TaxCatchAll xmlns="21b72fd8-e7d0-49ac-9795-d1b0bc6b7e1c" xsi:nil="true"/>
+    <lcf76f155ced4ddcb4097134ff3c332f xmlns="8b3acf13-3a58-43b2-a29e-f23503de136d">
+      <Terms xmlns="http://schemas.microsoft.com/office/infopath/2007/PartnerControls"/>
+    </lcf76f155ced4ddcb4097134ff3c332f>
+    <Argomento xmlns="8b3acf13-3a58-43b2-a29e-f23503de136d" xsi:nil="true"/>
+  </documentManagement>
+</p:properties>
+</file>
+
+<file path=customXml/item2.xml><?xml version="1.0" encoding="utf-8"?>
 <ct:contentTypeSchema xmlns:ct="http://schemas.microsoft.com/office/2006/metadata/contentType" xmlns:ma="http://schemas.microsoft.com/office/2006/metadata/properties/metaAttributes" ct:_="" ma:_="" ma:contentTypeName="Document" ma:contentTypeID="0x010100D3455C6CD0B9BF4DB2CA3009677D9668" ma:contentTypeVersion="17" ma:contentTypeDescription="Create a new document." ma:contentTypeScope="" ma:versionID="6361f2605a906a42d9630ca59d277a8b">
   <xsd:schema xmlns:xsd="http://www.w3.org/2001/XMLSchema" xmlns:xs="http://www.w3.org/2001/XMLSchema" xmlns:p="http://schemas.microsoft.com/office/2006/metadata/properties" xmlns:ns2="8b3acf13-3a58-43b2-a29e-f23503de136d" xmlns:ns3="21b72fd8-e7d0-49ac-9795-d1b0bc6b7e1c" targetNamespace="http://schemas.microsoft.com/office/2006/metadata/properties" ma:root="true" ma:fieldsID="ae4eb9e2c998b5efed80ec6126f835fa" ns2:_="" ns3:_="">
     <xsd:import namespace="8b3acf13-3a58-43b2-a29e-f23503de136d"/>
@@ -14006,7 +15071,7 @@
 </ct:contentTypeSchema>
 </file>
 
-<file path=customXml/item2.xml><?xml version="1.0" encoding="utf-8"?>
+<file path=customXml/item3.xml><?xml version="1.0" encoding="utf-8"?>
 <?mso-contentType ?>
 <FormTemplates xmlns="http://schemas.microsoft.com/sharepoint/v3/contenttype/forms">
   <Display>DocumentLibraryForm</Display>
@@ -14015,19 +15080,18 @@
 </FormTemplates>
 </file>
 
-<file path=customXml/item3.xml><?xml version="1.0" encoding="utf-8"?>
-<p:properties xmlns:p="http://schemas.microsoft.com/office/2006/metadata/properties" xmlns:xsi="http://www.w3.org/2001/XMLSchema-instance" xmlns:pc="http://schemas.microsoft.com/office/infopath/2007/PartnerControls">
-  <documentManagement>
-    <TaxCatchAll xmlns="21b72fd8-e7d0-49ac-9795-d1b0bc6b7e1c" xsi:nil="true"/>
-    <lcf76f155ced4ddcb4097134ff3c332f xmlns="8b3acf13-3a58-43b2-a29e-f23503de136d">
-      <Terms xmlns="http://schemas.microsoft.com/office/infopath/2007/PartnerControls"/>
-    </lcf76f155ced4ddcb4097134ff3c332f>
-    <Argomento xmlns="8b3acf13-3a58-43b2-a29e-f23503de136d" xsi:nil="true"/>
-  </documentManagement>
-</p:properties>
+<file path=customXml/itemProps1.xml><?xml version="1.0" encoding="utf-8"?>
+<ds:datastoreItem xmlns:ds="http://schemas.openxmlformats.org/officeDocument/2006/customXml" ds:itemID="{6766878A-54ED-4867-B478-72A29DC19B89}">
+  <ds:schemaRefs>
+    <ds:schemaRef ds:uri="http://schemas.microsoft.com/office/2006/metadata/properties"/>
+    <ds:schemaRef ds:uri="http://schemas.microsoft.com/office/infopath/2007/PartnerControls"/>
+    <ds:schemaRef ds:uri="21b72fd8-e7d0-49ac-9795-d1b0bc6b7e1c"/>
+    <ds:schemaRef ds:uri="8b3acf13-3a58-43b2-a29e-f23503de136d"/>
+  </ds:schemaRefs>
+</ds:datastoreItem>
 </file>
 
-<file path=customXml/itemProps1.xml><?xml version="1.0" encoding="utf-8"?>
+<file path=customXml/itemProps2.xml><?xml version="1.0" encoding="utf-8"?>
 <ds:datastoreItem xmlns:ds="http://schemas.openxmlformats.org/officeDocument/2006/customXml" ds:itemID="{70468F63-B318-4D5F-A1DF-86BE98AC2293}">
   <ds:schemaRefs>
     <ds:schemaRef ds:uri="http://schemas.microsoft.com/office/2006/metadata/contentType"/>
@@ -14046,21 +15110,10 @@
 </ds:datastoreItem>
 </file>
 
-<file path=customXml/itemProps2.xml><?xml version="1.0" encoding="utf-8"?>
+<file path=customXml/itemProps3.xml><?xml version="1.0" encoding="utf-8"?>
 <ds:datastoreItem xmlns:ds="http://schemas.openxmlformats.org/officeDocument/2006/customXml" ds:itemID="{67C65656-B2D8-4C19-A873-091B25A5212E}">
   <ds:schemaRefs>
     <ds:schemaRef ds:uri="http://schemas.microsoft.com/sharepoint/v3/contenttype/forms"/>
   </ds:schemaRefs>
 </ds:datastoreItem>
-</file>
-
-<file path=customXml/itemProps3.xml><?xml version="1.0" encoding="utf-8"?>
-<ds:datastoreItem xmlns:ds="http://schemas.openxmlformats.org/officeDocument/2006/customXml" ds:itemID="{6766878A-54ED-4867-B478-72A29DC19B89}">
-  <ds:schemaRefs>
-    <ds:schemaRef ds:uri="http://schemas.microsoft.com/office/2006/metadata/properties"/>
-    <ds:schemaRef ds:uri="http://schemas.microsoft.com/office/infopath/2007/PartnerControls"/>
-    <ds:schemaRef ds:uri="21b72fd8-e7d0-49ac-9795-d1b0bc6b7e1c"/>
-    <ds:schemaRef ds:uri="8b3acf13-3a58-43b2-a29e-f23503de136d"/>
-  </ds:schemaRefs>
-</ds:datastoreItem>
 </file>
--- a/1 - Introduzione a Docker.pptx
+++ b/1 - Introduzione a Docker.pptx
@@ -270,7 +270,7 @@
           <a:p>
             <a:fld id="{AB567D21-D55F-4A7B-94FF-7608FD989819}" type="datetimeFigureOut">
               <a:rPr lang="it-IT" smtClean="0"/>
-              <a:t>15/06/2026</a:t>
+              <a:t>18/06/2026</a:t>
             </a:fld>
             <a:endParaRPr lang="it-IT"/>
           </a:p>
@@ -463,7 +463,7 @@
           <a:p>
             <a:fld id="{CE0B2B73-14A8-482F-9803-A95CC73B5B34}" type="datetimeFigureOut">
               <a:rPr lang="it-IT" smtClean="0"/>
-              <a:t>15/06/2026</a:t>
+              <a:t>18/06/2026</a:t>
             </a:fld>
             <a:endParaRPr lang="it-IT"/>
           </a:p>
@@ -953,13 +953,13 @@
           <p:nvPr userDrawn="1"/>
         </p:nvPicPr>
         <p:blipFill>
-          <a:blip>
+          <a:blip r:embed="rId3">
             <a:extLst>
               <a:ext uri="{28A0092B-C50C-407E-A947-70E740481C1C}">
                 <a14:useLocalDpi xmlns:a14="http://schemas.microsoft.com/office/drawing/2010/main" val="0"/>
               </a:ext>
               <a:ext uri="{96DAC541-7B7A-43D3-8B79-37D633B846F1}">
-                <asvg:svgBlip xmlns:asvg="http://schemas.microsoft.com/office/drawing/2016/SVG/main" r:embed="rId3"/>
+                <asvg:svgBlip xmlns:asvg="http://schemas.microsoft.com/office/drawing/2016/SVG/main" r:embed="rId4"/>
               </a:ext>
             </a:extLst>
           </a:blip>
@@ -1430,14 +1430,14 @@
           <p:nvPr userDrawn="1"/>
         </p:nvPicPr>
         <p:blipFill>
-          <a:blip>
+          <a:blip r:embed="rId4">
             <a:lum bright="100000"/>
             <a:extLst>
               <a:ext uri="{28A0092B-C50C-407E-A947-70E740481C1C}">
                 <a14:useLocalDpi xmlns:a14="http://schemas.microsoft.com/office/drawing/2010/main" val="0"/>
               </a:ext>
               <a:ext uri="{96DAC541-7B7A-43D3-8B79-37D633B846F1}">
-                <asvg:svgBlip xmlns:asvg="http://schemas.microsoft.com/office/drawing/2016/SVG/main" r:embed="rId4"/>
+                <asvg:svgBlip xmlns:asvg="http://schemas.microsoft.com/office/drawing/2016/SVG/main" r:embed="rId5"/>
               </a:ext>
             </a:extLst>
           </a:blip>
@@ -1514,7 +1514,7 @@
           <p:nvPr userDrawn="1"/>
         </p:nvPicPr>
         <p:blipFill rotWithShape="1">
-          <a:blip r:embed="rId5" cstate="print"/>
+          <a:blip r:embed="rId6" cstate="print"/>
           <a:srcRect l="1386" t="187" r="342" b="95555"/>
           <a:stretch/>
         </p:blipFill>
@@ -1811,13 +1811,13 @@
           <p:nvPr userDrawn="1"/>
         </p:nvPicPr>
         <p:blipFill>
-          <a:blip>
+          <a:blip r:embed="rId2">
             <a:extLst>
               <a:ext uri="{28A0092B-C50C-407E-A947-70E740481C1C}">
                 <a14:useLocalDpi xmlns:a14="http://schemas.microsoft.com/office/drawing/2010/main" val="0"/>
               </a:ext>
               <a:ext uri="{96DAC541-7B7A-43D3-8B79-37D633B846F1}">
-                <asvg:svgBlip xmlns:asvg="http://schemas.microsoft.com/office/drawing/2016/SVG/main" r:embed="rId2"/>
+                <asvg:svgBlip xmlns:asvg="http://schemas.microsoft.com/office/drawing/2016/SVG/main" r:embed="rId3"/>
               </a:ext>
             </a:extLst>
           </a:blip>
@@ -2177,13 +2177,13 @@
           <p:nvPr userDrawn="1"/>
         </p:nvPicPr>
         <p:blipFill>
-          <a:blip>
+          <a:blip r:embed="rId2">
             <a:extLst>
               <a:ext uri="{28A0092B-C50C-407E-A947-70E740481C1C}">
                 <a14:useLocalDpi xmlns:a14="http://schemas.microsoft.com/office/drawing/2010/main" val="0"/>
               </a:ext>
               <a:ext uri="{96DAC541-7B7A-43D3-8B79-37D633B846F1}">
-                <asvg:svgBlip xmlns:asvg="http://schemas.microsoft.com/office/drawing/2016/SVG/main" r:embed="rId2"/>
+                <asvg:svgBlip xmlns:asvg="http://schemas.microsoft.com/office/drawing/2016/SVG/main" r:embed="rId3"/>
               </a:ext>
             </a:extLst>
           </a:blip>
@@ -2483,13 +2483,13 @@
           <p:nvPr userDrawn="1"/>
         </p:nvPicPr>
         <p:blipFill>
-          <a:blip>
+          <a:blip r:embed="rId3">
             <a:extLst>
               <a:ext uri="{28A0092B-C50C-407E-A947-70E740481C1C}">
                 <a14:useLocalDpi xmlns:a14="http://schemas.microsoft.com/office/drawing/2010/main" val="0"/>
               </a:ext>
               <a:ext uri="{96DAC541-7B7A-43D3-8B79-37D633B846F1}">
-                <asvg:svgBlip xmlns:asvg="http://schemas.microsoft.com/office/drawing/2016/SVG/main" r:embed="rId3"/>
+                <asvg:svgBlip xmlns:asvg="http://schemas.microsoft.com/office/drawing/2016/SVG/main" r:embed="rId4"/>
               </a:ext>
             </a:extLst>
           </a:blip>
@@ -2834,13 +2834,13 @@
           <p:nvPr userDrawn="1"/>
         </p:nvPicPr>
         <p:blipFill>
-          <a:blip>
+          <a:blip r:embed="rId3">
             <a:extLst>
               <a:ext uri="{28A0092B-C50C-407E-A947-70E740481C1C}">
                 <a14:useLocalDpi xmlns:a14="http://schemas.microsoft.com/office/drawing/2010/main" val="0"/>
               </a:ext>
               <a:ext uri="{96DAC541-7B7A-43D3-8B79-37D633B846F1}">
-                <asvg:svgBlip xmlns:asvg="http://schemas.microsoft.com/office/drawing/2016/SVG/main" r:embed="rId3"/>
+                <asvg:svgBlip xmlns:asvg="http://schemas.microsoft.com/office/drawing/2016/SVG/main" r:embed="rId4"/>
               </a:ext>
             </a:extLst>
           </a:blip>
@@ -3107,13 +3107,13 @@
           <p:nvPr userDrawn="1"/>
         </p:nvPicPr>
         <p:blipFill>
-          <a:blip>
+          <a:blip r:embed="rId9">
             <a:extLst>
               <a:ext uri="{28A0092B-C50C-407E-A947-70E740481C1C}">
                 <a14:useLocalDpi xmlns:a14="http://schemas.microsoft.com/office/drawing/2010/main" val="0"/>
               </a:ext>
               <a:ext uri="{96DAC541-7B7A-43D3-8B79-37D633B846F1}">
-                <asvg:svgBlip xmlns:asvg="http://schemas.microsoft.com/office/drawing/2016/SVG/main" r:embed="rId9"/>
+                <asvg:svgBlip xmlns:asvg="http://schemas.microsoft.com/office/drawing/2016/SVG/main" r:embed="rId10"/>
               </a:ext>
             </a:extLst>
           </a:blip>
@@ -9119,8 +9119,12 @@
           </a:p>
           <a:p>
             <a:r>
-              <a:rPr lang="it-IT" dirty="0"/>
-              <a:t>Docker non è nato per colmare il divario tra il mondo dello sviluppo (Dev) e quello delle operazioni sistemistiche (Ops), inaugurando di fatto l'era della metodologia </a:t>
+              <a:rPr lang="it-IT"/>
+              <a:t>Docker è </a:t>
+            </a:r>
+            <a:r>
+              <a:rPr lang="it-IT" dirty="0"/>
+              <a:t>nato per colmare il divario tra il mondo dello sviluppo (Dev) e quello delle operazioni sistemistiche (Ops), inaugurando di fatto l'era della metodologia </a:t>
             </a:r>
             <a:r>
               <a:rPr lang="it-IT" dirty="0" err="1"/>
@@ -14809,18 +14813,6 @@
 </file>
 
 <file path=customXml/item1.xml><?xml version="1.0" encoding="utf-8"?>
-<p:properties xmlns:p="http://schemas.microsoft.com/office/2006/metadata/properties" xmlns:xsi="http://www.w3.org/2001/XMLSchema-instance" xmlns:pc="http://schemas.microsoft.com/office/infopath/2007/PartnerControls">
-  <documentManagement>
-    <TaxCatchAll xmlns="21b72fd8-e7d0-49ac-9795-d1b0bc6b7e1c" xsi:nil="true"/>
-    <lcf76f155ced4ddcb4097134ff3c332f xmlns="8b3acf13-3a58-43b2-a29e-f23503de136d">
-      <Terms xmlns="http://schemas.microsoft.com/office/infopath/2007/PartnerControls"/>
-    </lcf76f155ced4ddcb4097134ff3c332f>
-    <Argomento xmlns="8b3acf13-3a58-43b2-a29e-f23503de136d" xsi:nil="true"/>
-  </documentManagement>
-</p:properties>
-</file>
-
-<file path=customXml/item2.xml><?xml version="1.0" encoding="utf-8"?>
 <ct:contentTypeSchema xmlns:ct="http://schemas.microsoft.com/office/2006/metadata/contentType" xmlns:ma="http://schemas.microsoft.com/office/2006/metadata/properties/metaAttributes" ct:_="" ma:_="" ma:contentTypeName="Document" ma:contentTypeID="0x010100D3455C6CD0B9BF4DB2CA3009677D9668" ma:contentTypeVersion="17" ma:contentTypeDescription="Create a new document." ma:contentTypeScope="" ma:versionID="6361f2605a906a42d9630ca59d277a8b">
   <xsd:schema xmlns:xsd="http://www.w3.org/2001/XMLSchema" xmlns:xs="http://www.w3.org/2001/XMLSchema" xmlns:p="http://schemas.microsoft.com/office/2006/metadata/properties" xmlns:ns2="8b3acf13-3a58-43b2-a29e-f23503de136d" xmlns:ns3="21b72fd8-e7d0-49ac-9795-d1b0bc6b7e1c" targetNamespace="http://schemas.microsoft.com/office/2006/metadata/properties" ma:root="true" ma:fieldsID="ae4eb9e2c998b5efed80ec6126f835fa" ns2:_="" ns3:_="">
     <xsd:import namespace="8b3acf13-3a58-43b2-a29e-f23503de136d"/>
@@ -15071,6 +15063,18 @@
 </ct:contentTypeSchema>
 </file>
 
+<file path=customXml/item2.xml><?xml version="1.0" encoding="utf-8"?>
+<p:properties xmlns:p="http://schemas.microsoft.com/office/2006/metadata/properties" xmlns:xsi="http://www.w3.org/2001/XMLSchema-instance" xmlns:pc="http://schemas.microsoft.com/office/infopath/2007/PartnerControls">
+  <documentManagement>
+    <TaxCatchAll xmlns="21b72fd8-e7d0-49ac-9795-d1b0bc6b7e1c" xsi:nil="true"/>
+    <lcf76f155ced4ddcb4097134ff3c332f xmlns="8b3acf13-3a58-43b2-a29e-f23503de136d">
+      <Terms xmlns="http://schemas.microsoft.com/office/infopath/2007/PartnerControls"/>
+    </lcf76f155ced4ddcb4097134ff3c332f>
+    <Argomento xmlns="8b3acf13-3a58-43b2-a29e-f23503de136d" xsi:nil="true"/>
+  </documentManagement>
+</p:properties>
+</file>
+
 <file path=customXml/item3.xml><?xml version="1.0" encoding="utf-8"?>
 <?mso-contentType ?>
 <FormTemplates xmlns="http://schemas.microsoft.com/sharepoint/v3/contenttype/forms">
@@ -15081,17 +15085,6 @@
 </file>
 
 <file path=customXml/itemProps1.xml><?xml version="1.0" encoding="utf-8"?>
-<ds:datastoreItem xmlns:ds="http://schemas.openxmlformats.org/officeDocument/2006/customXml" ds:itemID="{6766878A-54ED-4867-B478-72A29DC19B89}">
-  <ds:schemaRefs>
-    <ds:schemaRef ds:uri="http://schemas.microsoft.com/office/2006/metadata/properties"/>
-    <ds:schemaRef ds:uri="http://schemas.microsoft.com/office/infopath/2007/PartnerControls"/>
-    <ds:schemaRef ds:uri="21b72fd8-e7d0-49ac-9795-d1b0bc6b7e1c"/>
-    <ds:schemaRef ds:uri="8b3acf13-3a58-43b2-a29e-f23503de136d"/>
-  </ds:schemaRefs>
-</ds:datastoreItem>
-</file>
-
-<file path=customXml/itemProps2.xml><?xml version="1.0" encoding="utf-8"?>
 <ds:datastoreItem xmlns:ds="http://schemas.openxmlformats.org/officeDocument/2006/customXml" ds:itemID="{70468F63-B318-4D5F-A1DF-86BE98AC2293}">
   <ds:schemaRefs>
     <ds:schemaRef ds:uri="http://schemas.microsoft.com/office/2006/metadata/contentType"/>
@@ -15110,6 +15103,17 @@
 </ds:datastoreItem>
 </file>
 
+<file path=customXml/itemProps2.xml><?xml version="1.0" encoding="utf-8"?>
+<ds:datastoreItem xmlns:ds="http://schemas.openxmlformats.org/officeDocument/2006/customXml" ds:itemID="{6766878A-54ED-4867-B478-72A29DC19B89}">
+  <ds:schemaRefs>
+    <ds:schemaRef ds:uri="http://schemas.microsoft.com/office/2006/metadata/properties"/>
+    <ds:schemaRef ds:uri="http://schemas.microsoft.com/office/infopath/2007/PartnerControls"/>
+    <ds:schemaRef ds:uri="21b72fd8-e7d0-49ac-9795-d1b0bc6b7e1c"/>
+    <ds:schemaRef ds:uri="8b3acf13-3a58-43b2-a29e-f23503de136d"/>
+  </ds:schemaRefs>
+</ds:datastoreItem>
+</file>
+
 <file path=customXml/itemProps3.xml><?xml version="1.0" encoding="utf-8"?>
 <ds:datastoreItem xmlns:ds="http://schemas.openxmlformats.org/officeDocument/2006/customXml" ds:itemID="{67C65656-B2D8-4C19-A873-091B25A5212E}">
   <ds:schemaRefs>
